--- a/assets/figures-editable/c1-c2/c2-e14.pptx
+++ b/assets/figures-editable/c1-c2/c2-e14.pptx
@@ -7,7 +7,7 @@
   <p:sldIdLst>
     <p:sldId id="256" r:id="rId7"/>
   </p:sldIdLst>
-  <p:sldSz cx="11948160" cy="7924799" type="screen4x3"/>
+  <p:sldSz cx="12191695" cy="6858000" type="screen4x3"/>
   <p:notesSz cx="6858000" cy="9144000"/>
   <p:defaultTextStyle>
     <a:defPPr>
@@ -3098,14 +3098,14 @@
       <p:grpSpPr/>
       <p:sp>
         <p:nvSpPr>
-          <p:cNvPr id="2" name="text1" descr="sci-ppt:C2-E14-001"/>
+          <p:cNvPr id="2" name="C2-E14 text 0" descr="sci-ppt:o000"/>
           <p:cNvSpPr txBox="1"/>
           <p:nvPr/>
         </p:nvSpPr>
         <p:spPr>
           <a:xfrm>
-            <a:off x="316992" y="268224"/>
-            <a:ext cx="11277600" cy="359054"/>
+            <a:off x="274320" y="118872"/>
+            <a:ext cx="11612880" cy="340105"/>
           </a:xfrm>
           <a:prstGeom prst="rect">
             <a:avLst/>
@@ -3114,7 +3114,7 @@
           <a:effectLst/>
         </p:spPr>
         <p:txBody>
-          <a:bodyPr wrap="none" lIns="27432" rIns="27432" tIns="18288" bIns="18288" anchor="ctr">
+          <a:bodyPr wrap="none" lIns="18288" rIns="18288" tIns="18288" bIns="18288" anchor="t">
             <a:spAutoFit/>
           </a:bodyPr>
           <a:lstStyle/>
@@ -3125,37 +3125,2032 @@
               </a:spcAft>
             </a:pPr>
             <a:r>
-              <a:rPr sz="1823" b="0" i="0">
+              <a:rPr sz="1900" b="1" i="0">
                 <a:solidFill>
                   <a:srgbClr val="8EDBD4"/>
                 </a:solidFill>
                 <a:latin typeface="Arial"/>
               </a:rPr>
-              <a:t>C2-E14 | Physical-variable diagram</a:t>
-            </a:r>
-          </a:p>
-        </p:txBody>
-      </p:sp>
-      <p:sp>
-        <p:nvSpPr>
-          <p:cNvPr id="3" name="ellipse2" descr="sci-ppt:C2-E14-002"/>
+              <a:t>C2-E14 · Classical homogeneous capillarity approximation</a:t>
+            </a:r>
+          </a:p>
+        </p:txBody>
+      </p:sp>
+      <p:cxnSp>
+        <p:nvCxnSpPr>
+          <p:cNvPr id="3" name="C2-E14 line 1" descr="sci-ppt:o001"/>
+          <p:cNvCxnSpPr/>
+          <p:nvPr/>
+        </p:nvCxnSpPr>
+        <p:spPr>
+          <a:xfrm>
+            <a:off x="914400" y="5029200"/>
+            <a:ext cx="5852160" cy="0"/>
+          </a:xfrm>
+          <a:prstGeom prst="line">
+            <a:avLst/>
+          </a:prstGeom>
+          <a:ln w="19050">
+            <a:solidFill>
+              <a:srgbClr val="B4C7D2"/>
+            </a:solidFill>
+          </a:ln>
+          <a:effectLst/>
+        </p:spPr>
+      </p:cxnSp>
+      <p:cxnSp>
+        <p:nvCxnSpPr>
+          <p:cNvPr id="4" name="C2-E14 line 2" descr="sci-ppt:o002"/>
+          <p:cNvCxnSpPr/>
+          <p:nvPr/>
+        </p:nvCxnSpPr>
+        <p:spPr>
+          <a:xfrm>
+            <a:off x="914400" y="1371600"/>
+            <a:ext cx="0" cy="3657600"/>
+          </a:xfrm>
+          <a:prstGeom prst="line">
+            <a:avLst/>
+          </a:prstGeom>
+          <a:ln w="19050">
+            <a:solidFill>
+              <a:srgbClr val="B4C7D2"/>
+            </a:solidFill>
+          </a:ln>
+          <a:effectLst/>
+        </p:spPr>
+      </p:cxnSp>
+      <p:cxnSp>
+        <p:nvCxnSpPr>
+          <p:cNvPr id="5" name="C2-E14 line 3" descr="sci-ppt:o003"/>
+          <p:cNvCxnSpPr/>
+          <p:nvPr/>
+        </p:nvCxnSpPr>
+        <p:spPr>
+          <a:xfrm>
+            <a:off x="914400" y="5029200"/>
+            <a:ext cx="0" cy="64008"/>
+          </a:xfrm>
+          <a:prstGeom prst="line">
+            <a:avLst/>
+          </a:prstGeom>
+          <a:ln w="12700">
+            <a:solidFill>
+              <a:srgbClr val="B4C7D2"/>
+            </a:solidFill>
+          </a:ln>
+          <a:effectLst/>
+        </p:spPr>
+      </p:cxnSp>
+      <p:cxnSp>
+        <p:nvCxnSpPr>
+          <p:cNvPr id="6" name="C2-E14 line 4" descr="sci-ppt:o004"/>
+          <p:cNvCxnSpPr/>
+          <p:nvPr/>
+        </p:nvCxnSpPr>
+        <p:spPr>
+          <a:xfrm>
+            <a:off x="914400" y="1371600"/>
+            <a:ext cx="0" cy="3657600"/>
+          </a:xfrm>
+          <a:prstGeom prst="line">
+            <a:avLst/>
+          </a:prstGeom>
+          <a:ln w="7620">
+            <a:solidFill>
+              <a:srgbClr val="2E4756"/>
+            </a:solidFill>
+          </a:ln>
+          <a:effectLst/>
+        </p:spPr>
+      </p:cxnSp>
+      <p:sp>
+        <p:nvSpPr>
+          <p:cNvPr id="7" name="C2-E14 text 5" descr="sci-ppt:o005"/>
+          <p:cNvSpPr txBox="1"/>
+          <p:nvPr/>
+        </p:nvSpPr>
+        <p:spPr>
+          <a:xfrm>
+            <a:off x="457200" y="5111496"/>
+            <a:ext cx="914400" cy="208407"/>
+          </a:xfrm>
+          <a:prstGeom prst="rect">
+            <a:avLst/>
+          </a:prstGeom>
+          <a:noFill/>
+          <a:effectLst/>
+        </p:spPr>
+        <p:txBody>
+          <a:bodyPr wrap="none" lIns="18288" rIns="18288" tIns="18288" bIns="18288" anchor="t">
+            <a:spAutoFit/>
+          </a:bodyPr>
+          <a:lstStyle/>
+          <a:p>
+            <a:pPr algn="ctr">
+              <a:spcAft>
+                <a:spcPts val="0"/>
+              </a:spcAft>
+            </a:pPr>
+            <a:r>
+              <a:rPr sz="1050" b="0" i="0">
+                <a:solidFill>
+                  <a:srgbClr val="B4C7D2"/>
+                </a:solidFill>
+                <a:latin typeface="Arial"/>
+              </a:rPr>
+              <a:t>0.0</a:t>
+            </a:r>
+          </a:p>
+        </p:txBody>
+      </p:sp>
+      <p:cxnSp>
+        <p:nvCxnSpPr>
+          <p:cNvPr id="8" name="C2-E14 line 6" descr="sci-ppt:o006"/>
+          <p:cNvCxnSpPr/>
+          <p:nvPr/>
+        </p:nvCxnSpPr>
+        <p:spPr>
+          <a:xfrm>
+            <a:off x="2743200" y="5029200"/>
+            <a:ext cx="0" cy="64008"/>
+          </a:xfrm>
+          <a:prstGeom prst="line">
+            <a:avLst/>
+          </a:prstGeom>
+          <a:ln w="12700">
+            <a:solidFill>
+              <a:srgbClr val="B4C7D2"/>
+            </a:solidFill>
+          </a:ln>
+          <a:effectLst/>
+        </p:spPr>
+      </p:cxnSp>
+      <p:cxnSp>
+        <p:nvCxnSpPr>
+          <p:cNvPr id="9" name="C2-E14 line 7" descr="sci-ppt:o007"/>
+          <p:cNvCxnSpPr/>
+          <p:nvPr/>
+        </p:nvCxnSpPr>
+        <p:spPr>
+          <a:xfrm>
+            <a:off x="2743200" y="1371600"/>
+            <a:ext cx="0" cy="3657600"/>
+          </a:xfrm>
+          <a:prstGeom prst="line">
+            <a:avLst/>
+          </a:prstGeom>
+          <a:ln w="7620">
+            <a:solidFill>
+              <a:srgbClr val="2E4756"/>
+            </a:solidFill>
+          </a:ln>
+          <a:effectLst/>
+        </p:spPr>
+      </p:cxnSp>
+      <p:sp>
+        <p:nvSpPr>
+          <p:cNvPr id="10" name="C2-E14 text 8" descr="sci-ppt:o008"/>
+          <p:cNvSpPr txBox="1"/>
+          <p:nvPr/>
+        </p:nvSpPr>
+        <p:spPr>
+          <a:xfrm>
+            <a:off x="2286000" y="5111496"/>
+            <a:ext cx="914400" cy="208407"/>
+          </a:xfrm>
+          <a:prstGeom prst="rect">
+            <a:avLst/>
+          </a:prstGeom>
+          <a:noFill/>
+          <a:effectLst/>
+        </p:spPr>
+        <p:txBody>
+          <a:bodyPr wrap="none" lIns="18288" rIns="18288" tIns="18288" bIns="18288" anchor="t">
+            <a:spAutoFit/>
+          </a:bodyPr>
+          <a:lstStyle/>
+          <a:p>
+            <a:pPr algn="ctr">
+              <a:spcAft>
+                <a:spcPts val="0"/>
+              </a:spcAft>
+            </a:pPr>
+            <a:r>
+              <a:rPr sz="1050" b="0" i="0">
+                <a:solidFill>
+                  <a:srgbClr val="B4C7D2"/>
+                </a:solidFill>
+                <a:latin typeface="Arial"/>
+              </a:rPr>
+              <a:t>0.5</a:t>
+            </a:r>
+          </a:p>
+        </p:txBody>
+      </p:sp>
+      <p:cxnSp>
+        <p:nvCxnSpPr>
+          <p:cNvPr id="11" name="C2-E14 line 9" descr="sci-ppt:o009"/>
+          <p:cNvCxnSpPr/>
+          <p:nvPr/>
+        </p:nvCxnSpPr>
+        <p:spPr>
+          <a:xfrm>
+            <a:off x="4572000" y="5029200"/>
+            <a:ext cx="0" cy="64008"/>
+          </a:xfrm>
+          <a:prstGeom prst="line">
+            <a:avLst/>
+          </a:prstGeom>
+          <a:ln w="12700">
+            <a:solidFill>
+              <a:srgbClr val="B4C7D2"/>
+            </a:solidFill>
+          </a:ln>
+          <a:effectLst/>
+        </p:spPr>
+      </p:cxnSp>
+      <p:cxnSp>
+        <p:nvCxnSpPr>
+          <p:cNvPr id="12" name="C2-E14 line 10" descr="sci-ppt:o010"/>
+          <p:cNvCxnSpPr/>
+          <p:nvPr/>
+        </p:nvCxnSpPr>
+        <p:spPr>
+          <a:xfrm>
+            <a:off x="4572000" y="1371600"/>
+            <a:ext cx="0" cy="3657600"/>
+          </a:xfrm>
+          <a:prstGeom prst="line">
+            <a:avLst/>
+          </a:prstGeom>
+          <a:ln w="7620">
+            <a:solidFill>
+              <a:srgbClr val="2E4756"/>
+            </a:solidFill>
+          </a:ln>
+          <a:effectLst/>
+        </p:spPr>
+      </p:cxnSp>
+      <p:sp>
+        <p:nvSpPr>
+          <p:cNvPr id="13" name="C2-E14 text 11" descr="sci-ppt:o011"/>
+          <p:cNvSpPr txBox="1"/>
+          <p:nvPr/>
+        </p:nvSpPr>
+        <p:spPr>
+          <a:xfrm>
+            <a:off x="4114800" y="5111496"/>
+            <a:ext cx="914400" cy="208407"/>
+          </a:xfrm>
+          <a:prstGeom prst="rect">
+            <a:avLst/>
+          </a:prstGeom>
+          <a:noFill/>
+          <a:effectLst/>
+        </p:spPr>
+        <p:txBody>
+          <a:bodyPr wrap="none" lIns="18288" rIns="18288" tIns="18288" bIns="18288" anchor="t">
+            <a:spAutoFit/>
+          </a:bodyPr>
+          <a:lstStyle/>
+          <a:p>
+            <a:pPr algn="ctr">
+              <a:spcAft>
+                <a:spcPts val="0"/>
+              </a:spcAft>
+            </a:pPr>
+            <a:r>
+              <a:rPr sz="1050" b="0" i="0">
+                <a:solidFill>
+                  <a:srgbClr val="B4C7D2"/>
+                </a:solidFill>
+                <a:latin typeface="Arial"/>
+              </a:rPr>
+              <a:t>1.0</a:t>
+            </a:r>
+          </a:p>
+        </p:txBody>
+      </p:sp>
+      <p:cxnSp>
+        <p:nvCxnSpPr>
+          <p:cNvPr id="14" name="C2-E14 line 12" descr="sci-ppt:o012"/>
+          <p:cNvCxnSpPr/>
+          <p:nvPr/>
+        </p:nvCxnSpPr>
+        <p:spPr>
+          <a:xfrm>
+            <a:off x="6400800" y="5029200"/>
+            <a:ext cx="0" cy="64008"/>
+          </a:xfrm>
+          <a:prstGeom prst="line">
+            <a:avLst/>
+          </a:prstGeom>
+          <a:ln w="12700">
+            <a:solidFill>
+              <a:srgbClr val="B4C7D2"/>
+            </a:solidFill>
+          </a:ln>
+          <a:effectLst/>
+        </p:spPr>
+      </p:cxnSp>
+      <p:cxnSp>
+        <p:nvCxnSpPr>
+          <p:cNvPr id="15" name="C2-E14 line 13" descr="sci-ppt:o013"/>
+          <p:cNvCxnSpPr/>
+          <p:nvPr/>
+        </p:nvCxnSpPr>
+        <p:spPr>
+          <a:xfrm>
+            <a:off x="6400800" y="1371600"/>
+            <a:ext cx="0" cy="3657600"/>
+          </a:xfrm>
+          <a:prstGeom prst="line">
+            <a:avLst/>
+          </a:prstGeom>
+          <a:ln w="7620">
+            <a:solidFill>
+              <a:srgbClr val="2E4756"/>
+            </a:solidFill>
+          </a:ln>
+          <a:effectLst/>
+        </p:spPr>
+      </p:cxnSp>
+      <p:sp>
+        <p:nvSpPr>
+          <p:cNvPr id="16" name="C2-E14 text 14" descr="sci-ppt:o014"/>
+          <p:cNvSpPr txBox="1"/>
+          <p:nvPr/>
+        </p:nvSpPr>
+        <p:spPr>
+          <a:xfrm>
+            <a:off x="5943600" y="5111496"/>
+            <a:ext cx="914400" cy="208407"/>
+          </a:xfrm>
+          <a:prstGeom prst="rect">
+            <a:avLst/>
+          </a:prstGeom>
+          <a:noFill/>
+          <a:effectLst/>
+        </p:spPr>
+        <p:txBody>
+          <a:bodyPr wrap="none" lIns="18288" rIns="18288" tIns="18288" bIns="18288" anchor="t">
+            <a:spAutoFit/>
+          </a:bodyPr>
+          <a:lstStyle/>
+          <a:p>
+            <a:pPr algn="ctr">
+              <a:spcAft>
+                <a:spcPts val="0"/>
+              </a:spcAft>
+            </a:pPr>
+            <a:r>
+              <a:rPr sz="1050" b="0" i="0">
+                <a:solidFill>
+                  <a:srgbClr val="B4C7D2"/>
+                </a:solidFill>
+                <a:latin typeface="Arial"/>
+              </a:rPr>
+              <a:t>1.5</a:t>
+            </a:r>
+          </a:p>
+        </p:txBody>
+      </p:sp>
+      <p:cxnSp>
+        <p:nvCxnSpPr>
+          <p:cNvPr id="17" name="C2-E14 line 15" descr="sci-ppt:o015"/>
+          <p:cNvCxnSpPr/>
+          <p:nvPr/>
+        </p:nvCxnSpPr>
+        <p:spPr>
+          <a:xfrm>
+            <a:off x="850392" y="4506685"/>
+            <a:ext cx="64008" cy="0"/>
+          </a:xfrm>
+          <a:prstGeom prst="line">
+            <a:avLst/>
+          </a:prstGeom>
+          <a:ln w="12700">
+            <a:solidFill>
+              <a:srgbClr val="B4C7D2"/>
+            </a:solidFill>
+          </a:ln>
+          <a:effectLst/>
+        </p:spPr>
+      </p:cxnSp>
+      <p:cxnSp>
+        <p:nvCxnSpPr>
+          <p:cNvPr id="18" name="C2-E14 line 16" descr="sci-ppt:o016"/>
+          <p:cNvCxnSpPr/>
+          <p:nvPr/>
+        </p:nvCxnSpPr>
+        <p:spPr>
+          <a:xfrm>
+            <a:off x="914400" y="4506685"/>
+            <a:ext cx="5852160" cy="0"/>
+          </a:xfrm>
+          <a:prstGeom prst="line">
+            <a:avLst/>
+          </a:prstGeom>
+          <a:ln w="7620">
+            <a:solidFill>
+              <a:srgbClr val="2E4756"/>
+            </a:solidFill>
+          </a:ln>
+          <a:effectLst/>
+        </p:spPr>
+      </p:cxnSp>
+      <p:sp>
+        <p:nvSpPr>
+          <p:cNvPr id="19" name="C2-E14 text 17" descr="sci-ppt:o017"/>
+          <p:cNvSpPr txBox="1"/>
+          <p:nvPr/>
+        </p:nvSpPr>
+        <p:spPr>
+          <a:xfrm>
+            <a:off x="45720" y="4424389"/>
+            <a:ext cx="777240" cy="208407"/>
+          </a:xfrm>
+          <a:prstGeom prst="rect">
+            <a:avLst/>
+          </a:prstGeom>
+          <a:noFill/>
+          <a:effectLst/>
+        </p:spPr>
+        <p:txBody>
+          <a:bodyPr wrap="none" lIns="18288" rIns="18288" tIns="18288" bIns="18288" anchor="t">
+            <a:spAutoFit/>
+          </a:bodyPr>
+          <a:lstStyle/>
+          <a:p>
+            <a:pPr algn="r">
+              <a:spcAft>
+                <a:spcPts val="0"/>
+              </a:spcAft>
+            </a:pPr>
+            <a:r>
+              <a:rPr sz="1050" b="0" i="0">
+                <a:solidFill>
+                  <a:srgbClr val="B4C7D2"/>
+                </a:solidFill>
+                <a:latin typeface="Arial"/>
+              </a:rPr>
+              <a:t>-0.5</a:t>
+            </a:r>
+          </a:p>
+        </p:txBody>
+      </p:sp>
+      <p:cxnSp>
+        <p:nvCxnSpPr>
+          <p:cNvPr id="20" name="C2-E14 line 18" descr="sci-ppt:o018"/>
+          <p:cNvCxnSpPr/>
+          <p:nvPr/>
+        </p:nvCxnSpPr>
+        <p:spPr>
+          <a:xfrm>
+            <a:off x="850392" y="3635828"/>
+            <a:ext cx="64008" cy="0"/>
+          </a:xfrm>
+          <a:prstGeom prst="line">
+            <a:avLst/>
+          </a:prstGeom>
+          <a:ln w="12700">
+            <a:solidFill>
+              <a:srgbClr val="B4C7D2"/>
+            </a:solidFill>
+          </a:ln>
+          <a:effectLst/>
+        </p:spPr>
+      </p:cxnSp>
+      <p:cxnSp>
+        <p:nvCxnSpPr>
+          <p:cNvPr id="21" name="C2-E14 line 19" descr="sci-ppt:o019"/>
+          <p:cNvCxnSpPr/>
+          <p:nvPr/>
+        </p:nvCxnSpPr>
+        <p:spPr>
+          <a:xfrm>
+            <a:off x="914400" y="3635828"/>
+            <a:ext cx="5852160" cy="0"/>
+          </a:xfrm>
+          <a:prstGeom prst="line">
+            <a:avLst/>
+          </a:prstGeom>
+          <a:ln w="7620">
+            <a:solidFill>
+              <a:srgbClr val="2E4756"/>
+            </a:solidFill>
+          </a:ln>
+          <a:effectLst/>
+        </p:spPr>
+      </p:cxnSp>
+      <p:sp>
+        <p:nvSpPr>
+          <p:cNvPr id="22" name="C2-E14 text 20" descr="sci-ppt:o020"/>
+          <p:cNvSpPr txBox="1"/>
+          <p:nvPr/>
+        </p:nvSpPr>
+        <p:spPr>
+          <a:xfrm>
+            <a:off x="45720" y="3553532"/>
+            <a:ext cx="777240" cy="208407"/>
+          </a:xfrm>
+          <a:prstGeom prst="rect">
+            <a:avLst/>
+          </a:prstGeom>
+          <a:noFill/>
+          <a:effectLst/>
+        </p:spPr>
+        <p:txBody>
+          <a:bodyPr wrap="none" lIns="18288" rIns="18288" tIns="18288" bIns="18288" anchor="t">
+            <a:spAutoFit/>
+          </a:bodyPr>
+          <a:lstStyle/>
+          <a:p>
+            <a:pPr algn="r">
+              <a:spcAft>
+                <a:spcPts val="0"/>
+              </a:spcAft>
+            </a:pPr>
+            <a:r>
+              <a:rPr sz="1050" b="0" i="0">
+                <a:solidFill>
+                  <a:srgbClr val="B4C7D2"/>
+                </a:solidFill>
+                <a:latin typeface="Arial"/>
+              </a:rPr>
+              <a:t>0.0</a:t>
+            </a:r>
+          </a:p>
+        </p:txBody>
+      </p:sp>
+      <p:cxnSp>
+        <p:nvCxnSpPr>
+          <p:cNvPr id="23" name="C2-E14 line 21" descr="sci-ppt:o021"/>
+          <p:cNvCxnSpPr/>
+          <p:nvPr/>
+        </p:nvCxnSpPr>
+        <p:spPr>
+          <a:xfrm>
+            <a:off x="850392" y="2764971"/>
+            <a:ext cx="64008" cy="0"/>
+          </a:xfrm>
+          <a:prstGeom prst="line">
+            <a:avLst/>
+          </a:prstGeom>
+          <a:ln w="12700">
+            <a:solidFill>
+              <a:srgbClr val="B4C7D2"/>
+            </a:solidFill>
+          </a:ln>
+          <a:effectLst/>
+        </p:spPr>
+      </p:cxnSp>
+      <p:cxnSp>
+        <p:nvCxnSpPr>
+          <p:cNvPr id="24" name="C2-E14 line 22" descr="sci-ppt:o022"/>
+          <p:cNvCxnSpPr/>
+          <p:nvPr/>
+        </p:nvCxnSpPr>
+        <p:spPr>
+          <a:xfrm>
+            <a:off x="914400" y="2764971"/>
+            <a:ext cx="5852160" cy="0"/>
+          </a:xfrm>
+          <a:prstGeom prst="line">
+            <a:avLst/>
+          </a:prstGeom>
+          <a:ln w="7620">
+            <a:solidFill>
+              <a:srgbClr val="2E4756"/>
+            </a:solidFill>
+          </a:ln>
+          <a:effectLst/>
+        </p:spPr>
+      </p:cxnSp>
+      <p:sp>
+        <p:nvSpPr>
+          <p:cNvPr id="25" name="C2-E14 text 23" descr="sci-ppt:o023"/>
+          <p:cNvSpPr txBox="1"/>
+          <p:nvPr/>
+        </p:nvSpPr>
+        <p:spPr>
+          <a:xfrm>
+            <a:off x="45720" y="2682675"/>
+            <a:ext cx="777240" cy="208407"/>
+          </a:xfrm>
+          <a:prstGeom prst="rect">
+            <a:avLst/>
+          </a:prstGeom>
+          <a:noFill/>
+          <a:effectLst/>
+        </p:spPr>
+        <p:txBody>
+          <a:bodyPr wrap="none" lIns="18288" rIns="18288" tIns="18288" bIns="18288" anchor="t">
+            <a:spAutoFit/>
+          </a:bodyPr>
+          <a:lstStyle/>
+          <a:p>
+            <a:pPr algn="r">
+              <a:spcAft>
+                <a:spcPts val="0"/>
+              </a:spcAft>
+            </a:pPr>
+            <a:r>
+              <a:rPr sz="1050" b="0" i="0">
+                <a:solidFill>
+                  <a:srgbClr val="B4C7D2"/>
+                </a:solidFill>
+                <a:latin typeface="Arial"/>
+              </a:rPr>
+              <a:t>0.5</a:t>
+            </a:r>
+          </a:p>
+        </p:txBody>
+      </p:sp>
+      <p:cxnSp>
+        <p:nvCxnSpPr>
+          <p:cNvPr id="26" name="C2-E14 line 24" descr="sci-ppt:o024"/>
+          <p:cNvCxnSpPr/>
+          <p:nvPr/>
+        </p:nvCxnSpPr>
+        <p:spPr>
+          <a:xfrm>
+            <a:off x="850392" y="1894114"/>
+            <a:ext cx="64008" cy="0"/>
+          </a:xfrm>
+          <a:prstGeom prst="line">
+            <a:avLst/>
+          </a:prstGeom>
+          <a:ln w="12700">
+            <a:solidFill>
+              <a:srgbClr val="B4C7D2"/>
+            </a:solidFill>
+          </a:ln>
+          <a:effectLst/>
+        </p:spPr>
+      </p:cxnSp>
+      <p:cxnSp>
+        <p:nvCxnSpPr>
+          <p:cNvPr id="27" name="C2-E14 line 25" descr="sci-ppt:o025"/>
+          <p:cNvCxnSpPr/>
+          <p:nvPr/>
+        </p:nvCxnSpPr>
+        <p:spPr>
+          <a:xfrm>
+            <a:off x="914400" y="1894114"/>
+            <a:ext cx="5852160" cy="0"/>
+          </a:xfrm>
+          <a:prstGeom prst="line">
+            <a:avLst/>
+          </a:prstGeom>
+          <a:ln w="7620">
+            <a:solidFill>
+              <a:srgbClr val="2E4756"/>
+            </a:solidFill>
+          </a:ln>
+          <a:effectLst/>
+        </p:spPr>
+      </p:cxnSp>
+      <p:sp>
+        <p:nvSpPr>
+          <p:cNvPr id="28" name="C2-E14 text 26" descr="sci-ppt:o026"/>
+          <p:cNvSpPr txBox="1"/>
+          <p:nvPr/>
+        </p:nvSpPr>
+        <p:spPr>
+          <a:xfrm>
+            <a:off x="45720" y="1811818"/>
+            <a:ext cx="777240" cy="208407"/>
+          </a:xfrm>
+          <a:prstGeom prst="rect">
+            <a:avLst/>
+          </a:prstGeom>
+          <a:noFill/>
+          <a:effectLst/>
+        </p:spPr>
+        <p:txBody>
+          <a:bodyPr wrap="none" lIns="18288" rIns="18288" tIns="18288" bIns="18288" anchor="t">
+            <a:spAutoFit/>
+          </a:bodyPr>
+          <a:lstStyle/>
+          <a:p>
+            <a:pPr algn="r">
+              <a:spcAft>
+                <a:spcPts val="0"/>
+              </a:spcAft>
+            </a:pPr>
+            <a:r>
+              <a:rPr sz="1050" b="0" i="0">
+                <a:solidFill>
+                  <a:srgbClr val="B4C7D2"/>
+                </a:solidFill>
+                <a:latin typeface="Arial"/>
+              </a:rPr>
+              <a:t>1.0</a:t>
+            </a:r>
+          </a:p>
+        </p:txBody>
+      </p:sp>
+      <p:sp>
+        <p:nvSpPr>
+          <p:cNvPr id="29" name="C2-E14 text 27" descr="sci-ppt:o027"/>
+          <p:cNvSpPr txBox="1"/>
+          <p:nvPr/>
+        </p:nvSpPr>
+        <p:spPr>
+          <a:xfrm>
+            <a:off x="914400" y="5312664"/>
+            <a:ext cx="5852160" cy="231648"/>
+          </a:xfrm>
+          <a:prstGeom prst="rect">
+            <a:avLst/>
+          </a:prstGeom>
+          <a:noFill/>
+          <a:effectLst/>
+        </p:spPr>
+        <p:txBody>
+          <a:bodyPr wrap="none" lIns="18288" rIns="18288" tIns="18288" bIns="18288" anchor="t">
+            <a:spAutoFit/>
+          </a:bodyPr>
+          <a:lstStyle/>
+          <a:p>
+            <a:pPr algn="ctr">
+              <a:spcAft>
+                <a:spcPts val="0"/>
+              </a:spcAft>
+            </a:pPr>
+            <a:r>
+              <a:rPr sz="1200" b="0" i="0">
+                <a:solidFill>
+                  <a:srgbClr val="E7F0F3"/>
+                </a:solidFill>
+                <a:latin typeface="Arial"/>
+              </a:rPr>
+              <a:t>rₙ / r*</a:t>
+            </a:r>
+          </a:p>
+        </p:txBody>
+      </p:sp>
+      <p:sp>
+        <p:nvSpPr>
+          <p:cNvPr id="30" name="C2-E14 text 28" descr="sci-ppt:o028"/>
+          <p:cNvSpPr txBox="1"/>
+          <p:nvPr/>
+        </p:nvSpPr>
+        <p:spPr>
+          <a:xfrm>
+            <a:off x="365760" y="1024128"/>
+            <a:ext cx="5852160" cy="231648"/>
+          </a:xfrm>
+          <a:prstGeom prst="rect">
+            <a:avLst/>
+          </a:prstGeom>
+          <a:noFill/>
+          <a:effectLst/>
+        </p:spPr>
+        <p:txBody>
+          <a:bodyPr wrap="none" lIns="18288" rIns="18288" tIns="18288" bIns="18288" anchor="t">
+            <a:spAutoFit/>
+          </a:bodyPr>
+          <a:lstStyle/>
+          <a:p>
+            <a:pPr algn="l">
+              <a:spcAft>
+                <a:spcPts val="0"/>
+              </a:spcAft>
+            </a:pPr>
+            <a:r>
+              <a:rPr sz="1200" b="0" i="0">
+                <a:solidFill>
+                  <a:srgbClr val="E7F0F3"/>
+                </a:solidFill>
+                <a:latin typeface="Arial"/>
+              </a:rPr>
+              <a:t>W / W*</a:t>
+            </a:r>
+          </a:p>
+        </p:txBody>
+      </p:sp>
+      <p:cxnSp>
+        <p:nvCxnSpPr>
+          <p:cNvPr id="31" name="C2-E14 line 29" descr="sci-ppt:o029"/>
+          <p:cNvCxnSpPr/>
+          <p:nvPr/>
+        </p:nvCxnSpPr>
+        <p:spPr>
+          <a:xfrm>
+            <a:off x="914400" y="3635828"/>
+            <a:ext cx="5852160" cy="0"/>
+          </a:xfrm>
+          <a:prstGeom prst="line">
+            <a:avLst/>
+          </a:prstGeom>
+          <a:ln w="15240">
+            <a:solidFill>
+              <a:srgbClr val="2E4756"/>
+            </a:solidFill>
+          </a:ln>
+          <a:effectLst/>
+        </p:spPr>
+      </p:cxnSp>
+      <p:sp>
+        <p:nvSpPr>
+          <p:cNvPr id="32" name="C2-E14 polygon 30" descr="sci-ppt:o030"/>
           <p:cNvSpPr/>
           <p:nvPr/>
         </p:nvSpPr>
         <p:spPr>
           <a:xfrm>
-            <a:off x="1341120" y="1280160"/>
-            <a:ext cx="2804160" cy="2804160"/>
+            <a:off x="914400" y="1408853"/>
+            <a:ext cx="2387837" cy="2226975"/>
+          </a:xfrm>
+          <a:custGeom>
+            <a:avLst/>
+            <a:gdLst/>
+            <a:ahLst/>
+            <a:cxnLst/>
+            <a:rect l="l" t="t" r="r" b="b"/>
+            <a:pathLst>
+              <a:path w="2387837" h="2226975">
+                <a:moveTo>
+                  <a:pt x="0" y="2226975"/>
+                </a:moveTo>
+                <a:lnTo>
+                  <a:pt x="39144" y="2226377"/>
+                </a:lnTo>
+                <a:lnTo>
+                  <a:pt x="78289" y="2224581"/>
+                </a:lnTo>
+                <a:lnTo>
+                  <a:pt x="117434" y="2221589"/>
+                </a:lnTo>
+                <a:lnTo>
+                  <a:pt x="156579" y="2217399"/>
+                </a:lnTo>
+                <a:lnTo>
+                  <a:pt x="195724" y="2212013"/>
+                </a:lnTo>
+                <a:lnTo>
+                  <a:pt x="234869" y="2205429"/>
+                </a:lnTo>
+                <a:lnTo>
+                  <a:pt x="274014" y="2197649"/>
+                </a:lnTo>
+                <a:lnTo>
+                  <a:pt x="313159" y="2188672"/>
+                </a:lnTo>
+                <a:lnTo>
+                  <a:pt x="352303" y="2178498"/>
+                </a:lnTo>
+                <a:lnTo>
+                  <a:pt x="391448" y="2167126"/>
+                </a:lnTo>
+                <a:lnTo>
+                  <a:pt x="430593" y="2154558"/>
+                </a:lnTo>
+                <a:lnTo>
+                  <a:pt x="469738" y="2140793"/>
+                </a:lnTo>
+                <a:lnTo>
+                  <a:pt x="508883" y="2125831"/>
+                </a:lnTo>
+                <a:lnTo>
+                  <a:pt x="548028" y="2109671"/>
+                </a:lnTo>
+                <a:lnTo>
+                  <a:pt x="587173" y="2092315"/>
+                </a:lnTo>
+                <a:lnTo>
+                  <a:pt x="626318" y="2073762"/>
+                </a:lnTo>
+                <a:lnTo>
+                  <a:pt x="665463" y="2054012"/>
+                </a:lnTo>
+                <a:lnTo>
+                  <a:pt x="704607" y="2033065"/>
+                </a:lnTo>
+                <a:lnTo>
+                  <a:pt x="743752" y="2010921"/>
+                </a:lnTo>
+                <a:lnTo>
+                  <a:pt x="782897" y="1987580"/>
+                </a:lnTo>
+                <a:lnTo>
+                  <a:pt x="822042" y="1963042"/>
+                </a:lnTo>
+                <a:lnTo>
+                  <a:pt x="861187" y="1937307"/>
+                </a:lnTo>
+                <a:lnTo>
+                  <a:pt x="900332" y="1910375"/>
+                </a:lnTo>
+                <a:lnTo>
+                  <a:pt x="939477" y="1882246"/>
+                </a:lnTo>
+                <a:lnTo>
+                  <a:pt x="978622" y="1852920"/>
+                </a:lnTo>
+                <a:lnTo>
+                  <a:pt x="1017766" y="1822397"/>
+                </a:lnTo>
+                <a:lnTo>
+                  <a:pt x="1056911" y="1790677"/>
+                </a:lnTo>
+                <a:lnTo>
+                  <a:pt x="1096056" y="1757760"/>
+                </a:lnTo>
+                <a:lnTo>
+                  <a:pt x="1135201" y="1723646"/>
+                </a:lnTo>
+                <a:lnTo>
+                  <a:pt x="1174346" y="1688335"/>
+                </a:lnTo>
+                <a:lnTo>
+                  <a:pt x="1213491" y="1651828"/>
+                </a:lnTo>
+                <a:lnTo>
+                  <a:pt x="1252636" y="1614123"/>
+                </a:lnTo>
+                <a:lnTo>
+                  <a:pt x="1291781" y="1575221"/>
+                </a:lnTo>
+                <a:lnTo>
+                  <a:pt x="1330926" y="1535122"/>
+                </a:lnTo>
+                <a:lnTo>
+                  <a:pt x="1370070" y="1493827"/>
+                </a:lnTo>
+                <a:lnTo>
+                  <a:pt x="1409215" y="1451334"/>
+                </a:lnTo>
+                <a:lnTo>
+                  <a:pt x="1448360" y="1407644"/>
+                </a:lnTo>
+                <a:lnTo>
+                  <a:pt x="1487505" y="1362758"/>
+                </a:lnTo>
+                <a:lnTo>
+                  <a:pt x="1526650" y="1316674"/>
+                </a:lnTo>
+                <a:lnTo>
+                  <a:pt x="1565795" y="1269394"/>
+                </a:lnTo>
+                <a:lnTo>
+                  <a:pt x="1604940" y="1220916"/>
+                </a:lnTo>
+                <a:lnTo>
+                  <a:pt x="1644085" y="1171242"/>
+                </a:lnTo>
+                <a:lnTo>
+                  <a:pt x="1683229" y="1120370"/>
+                </a:lnTo>
+                <a:lnTo>
+                  <a:pt x="1722374" y="1068301"/>
+                </a:lnTo>
+                <a:lnTo>
+                  <a:pt x="1761519" y="1015036"/>
+                </a:lnTo>
+                <a:lnTo>
+                  <a:pt x="1800664" y="960574"/>
+                </a:lnTo>
+                <a:lnTo>
+                  <a:pt x="1839809" y="904914"/>
+                </a:lnTo>
+                <a:lnTo>
+                  <a:pt x="1878954" y="848058"/>
+                </a:lnTo>
+                <a:lnTo>
+                  <a:pt x="1918099" y="790004"/>
+                </a:lnTo>
+                <a:lnTo>
+                  <a:pt x="1957244" y="730754"/>
+                </a:lnTo>
+                <a:lnTo>
+                  <a:pt x="1996389" y="670307"/>
+                </a:lnTo>
+                <a:lnTo>
+                  <a:pt x="2035533" y="608662"/>
+                </a:lnTo>
+                <a:lnTo>
+                  <a:pt x="2074678" y="545821"/>
+                </a:lnTo>
+                <a:lnTo>
+                  <a:pt x="2113823" y="481783"/>
+                </a:lnTo>
+                <a:lnTo>
+                  <a:pt x="2152968" y="416548"/>
+                </a:lnTo>
+                <a:lnTo>
+                  <a:pt x="2192113" y="350115"/>
+                </a:lnTo>
+                <a:lnTo>
+                  <a:pt x="2231258" y="282486"/>
+                </a:lnTo>
+                <a:lnTo>
+                  <a:pt x="2270403" y="213660"/>
+                </a:lnTo>
+                <a:lnTo>
+                  <a:pt x="2309548" y="143637"/>
+                </a:lnTo>
+                <a:lnTo>
+                  <a:pt x="2348692" y="72417"/>
+                </a:lnTo>
+                <a:lnTo>
+                  <a:pt x="2387837" y="0"/>
+                </a:lnTo>
+              </a:path>
+            </a:pathLst>
+          </a:custGeom>
+          <a:noFill/>
+          <a:ln w="27940">
+            <a:solidFill>
+              <a:srgbClr val="F28BA0"/>
+            </a:solidFill>
+            <a:prstDash val="dash"/>
+          </a:ln>
+          <a:effectLst/>
+        </p:spPr>
+        <p:txBody>
+          <a:bodyPr rtlCol="0" anchor="ctr"/>
+          <a:lstStyle/>
+          <a:p>
+            <a:pPr algn="ctr"/>
+          </a:p>
+        </p:txBody>
+      </p:sp>
+      <p:sp>
+        <p:nvSpPr>
+          <p:cNvPr id="33" name="C2-E14 polygon 31" descr="sci-ppt:o031"/>
+          <p:cNvSpPr/>
+          <p:nvPr/>
+        </p:nvSpPr>
+        <p:spPr>
+          <a:xfrm>
+            <a:off x="914400" y="3635828"/>
+            <a:ext cx="2661852" cy="1342672"/>
+          </a:xfrm>
+          <a:custGeom>
+            <a:avLst/>
+            <a:gdLst/>
+            <a:ahLst/>
+            <a:cxnLst/>
+            <a:rect l="l" t="t" r="r" b="b"/>
+            <a:pathLst>
+              <a:path w="2661852" h="1342672">
+                <a:moveTo>
+                  <a:pt x="0" y="0"/>
+                </a:moveTo>
+                <a:lnTo>
+                  <a:pt x="39144" y="4"/>
+                </a:lnTo>
+                <a:lnTo>
+                  <a:pt x="78289" y="34"/>
+                </a:lnTo>
+                <a:lnTo>
+                  <a:pt x="117434" y="115"/>
+                </a:lnTo>
+                <a:lnTo>
+                  <a:pt x="156579" y="273"/>
+                </a:lnTo>
+                <a:lnTo>
+                  <a:pt x="195724" y="534"/>
+                </a:lnTo>
+                <a:lnTo>
+                  <a:pt x="234869" y="922"/>
+                </a:lnTo>
+                <a:lnTo>
+                  <a:pt x="274014" y="1465"/>
+                </a:lnTo>
+                <a:lnTo>
+                  <a:pt x="313159" y="2186"/>
+                </a:lnTo>
+                <a:lnTo>
+                  <a:pt x="352303" y="3113"/>
+                </a:lnTo>
+                <a:lnTo>
+                  <a:pt x="391448" y="4270"/>
+                </a:lnTo>
+                <a:lnTo>
+                  <a:pt x="430593" y="5684"/>
+                </a:lnTo>
+                <a:lnTo>
+                  <a:pt x="469738" y="7379"/>
+                </a:lnTo>
+                <a:lnTo>
+                  <a:pt x="508883" y="9382"/>
+                </a:lnTo>
+                <a:lnTo>
+                  <a:pt x="548028" y="11717"/>
+                </a:lnTo>
+                <a:lnTo>
+                  <a:pt x="587173" y="14412"/>
+                </a:lnTo>
+                <a:lnTo>
+                  <a:pt x="626318" y="17491"/>
+                </a:lnTo>
+                <a:lnTo>
+                  <a:pt x="665463" y="20979"/>
+                </a:lnTo>
+                <a:lnTo>
+                  <a:pt x="704607" y="24904"/>
+                </a:lnTo>
+                <a:lnTo>
+                  <a:pt x="743752" y="29289"/>
+                </a:lnTo>
+                <a:lnTo>
+                  <a:pt x="782897" y="34161"/>
+                </a:lnTo>
+                <a:lnTo>
+                  <a:pt x="822042" y="39546"/>
+                </a:lnTo>
+                <a:lnTo>
+                  <a:pt x="861187" y="45469"/>
+                </a:lnTo>
+                <a:lnTo>
+                  <a:pt x="900332" y="51955"/>
+                </a:lnTo>
+                <a:lnTo>
+                  <a:pt x="939477" y="59031"/>
+                </a:lnTo>
+                <a:lnTo>
+                  <a:pt x="978622" y="66721"/>
+                </a:lnTo>
+                <a:lnTo>
+                  <a:pt x="1017766" y="75052"/>
+                </a:lnTo>
+                <a:lnTo>
+                  <a:pt x="1056911" y="84049"/>
+                </a:lnTo>
+                <a:lnTo>
+                  <a:pt x="1096056" y="93738"/>
+                </a:lnTo>
+                <a:lnTo>
+                  <a:pt x="1135201" y="104145"/>
+                </a:lnTo>
+                <a:lnTo>
+                  <a:pt x="1174346" y="115294"/>
+                </a:lnTo>
+                <a:lnTo>
+                  <a:pt x="1213491" y="127212"/>
+                </a:lnTo>
+                <a:lnTo>
+                  <a:pt x="1252636" y="139924"/>
+                </a:lnTo>
+                <a:lnTo>
+                  <a:pt x="1291781" y="153457"/>
+                </a:lnTo>
+                <a:lnTo>
+                  <a:pt x="1330926" y="167834"/>
+                </a:lnTo>
+                <a:lnTo>
+                  <a:pt x="1370070" y="183083"/>
+                </a:lnTo>
+                <a:lnTo>
+                  <a:pt x="1409215" y="199228"/>
+                </a:lnTo>
+                <a:lnTo>
+                  <a:pt x="1448360" y="216296"/>
+                </a:lnTo>
+                <a:lnTo>
+                  <a:pt x="1487505" y="234312"/>
+                </a:lnTo>
+                <a:lnTo>
+                  <a:pt x="1526650" y="253301"/>
+                </a:lnTo>
+                <a:lnTo>
+                  <a:pt x="1565795" y="273290"/>
+                </a:lnTo>
+                <a:lnTo>
+                  <a:pt x="1604940" y="294303"/>
+                </a:lnTo>
+                <a:lnTo>
+                  <a:pt x="1644085" y="316367"/>
+                </a:lnTo>
+                <a:lnTo>
+                  <a:pt x="1683229" y="339507"/>
+                </a:lnTo>
+                <a:lnTo>
+                  <a:pt x="1722374" y="363749"/>
+                </a:lnTo>
+                <a:lnTo>
+                  <a:pt x="1761519" y="389118"/>
+                </a:lnTo>
+                <a:lnTo>
+                  <a:pt x="1800664" y="415640"/>
+                </a:lnTo>
+                <a:lnTo>
+                  <a:pt x="1839809" y="443340"/>
+                </a:lnTo>
+                <a:lnTo>
+                  <a:pt x="1878954" y="472245"/>
+                </a:lnTo>
+                <a:lnTo>
+                  <a:pt x="1918099" y="502379"/>
+                </a:lnTo>
+                <a:lnTo>
+                  <a:pt x="1957244" y="533769"/>
+                </a:lnTo>
+                <a:lnTo>
+                  <a:pt x="1996389" y="566440"/>
+                </a:lnTo>
+                <a:lnTo>
+                  <a:pt x="2035533" y="600418"/>
+                </a:lnTo>
+                <a:lnTo>
+                  <a:pt x="2074678" y="635727"/>
+                </a:lnTo>
+                <a:lnTo>
+                  <a:pt x="2113823" y="672395"/>
+                </a:lnTo>
+                <a:lnTo>
+                  <a:pt x="2152968" y="710447"/>
+                </a:lnTo>
+                <a:lnTo>
+                  <a:pt x="2192113" y="749907"/>
+                </a:lnTo>
+                <a:lnTo>
+                  <a:pt x="2231258" y="790802"/>
+                </a:lnTo>
+                <a:lnTo>
+                  <a:pt x="2270403" y="833158"/>
+                </a:lnTo>
+                <a:lnTo>
+                  <a:pt x="2309548" y="877000"/>
+                </a:lnTo>
+                <a:lnTo>
+                  <a:pt x="2348692" y="922353"/>
+                </a:lnTo>
+                <a:lnTo>
+                  <a:pt x="2387837" y="969243"/>
+                </a:lnTo>
+                <a:lnTo>
+                  <a:pt x="2426982" y="1017697"/>
+                </a:lnTo>
+                <a:lnTo>
+                  <a:pt x="2466127" y="1067739"/>
+                </a:lnTo>
+                <a:lnTo>
+                  <a:pt x="2505272" y="1119395"/>
+                </a:lnTo>
+                <a:lnTo>
+                  <a:pt x="2544417" y="1172690"/>
+                </a:lnTo>
+                <a:lnTo>
+                  <a:pt x="2583562" y="1227652"/>
+                </a:lnTo>
+                <a:lnTo>
+                  <a:pt x="2622707" y="1284304"/>
+                </a:lnTo>
+                <a:lnTo>
+                  <a:pt x="2661852" y="1342672"/>
+                </a:lnTo>
+              </a:path>
+            </a:pathLst>
+          </a:custGeom>
+          <a:noFill/>
+          <a:ln w="27940">
+            <a:solidFill>
+              <a:srgbClr val="7FC8F8"/>
+            </a:solidFill>
+            <a:prstDash val="dash"/>
+          </a:ln>
+          <a:effectLst/>
+        </p:spPr>
+        <p:txBody>
+          <a:bodyPr rtlCol="0" anchor="ctr"/>
+          <a:lstStyle/>
+          <a:p>
+            <a:pPr algn="ctr"/>
+          </a:p>
+        </p:txBody>
+      </p:sp>
+      <p:sp>
+        <p:nvSpPr>
+          <p:cNvPr id="34" name="C2-E14 polygon 32" descr="sci-ppt:o032"/>
+          <p:cNvSpPr/>
+          <p:nvPr/>
+        </p:nvSpPr>
+        <p:spPr>
+          <a:xfrm>
+            <a:off x="914400" y="1894228"/>
+            <a:ext cx="5852160" cy="2633358"/>
+          </a:xfrm>
+          <a:custGeom>
+            <a:avLst/>
+            <a:gdLst/>
+            <a:ahLst/>
+            <a:cxnLst/>
+            <a:rect l="l" t="t" r="r" b="b"/>
+            <a:pathLst>
+              <a:path w="5852160" h="2633358">
+                <a:moveTo>
+                  <a:pt x="0" y="1741600"/>
+                </a:moveTo>
+                <a:lnTo>
+                  <a:pt x="39144" y="1741006"/>
+                </a:lnTo>
+                <a:lnTo>
+                  <a:pt x="78289" y="1739240"/>
+                </a:lnTo>
+                <a:lnTo>
+                  <a:pt x="117434" y="1736329"/>
+                </a:lnTo>
+                <a:lnTo>
+                  <a:pt x="156579" y="1732298"/>
+                </a:lnTo>
+                <a:lnTo>
+                  <a:pt x="195724" y="1727172"/>
+                </a:lnTo>
+                <a:lnTo>
+                  <a:pt x="234869" y="1720977"/>
+                </a:lnTo>
+                <a:lnTo>
+                  <a:pt x="274014" y="1713739"/>
+                </a:lnTo>
+                <a:lnTo>
+                  <a:pt x="313159" y="1705483"/>
+                </a:lnTo>
+                <a:lnTo>
+                  <a:pt x="352303" y="1696235"/>
+                </a:lnTo>
+                <a:lnTo>
+                  <a:pt x="391448" y="1686021"/>
+                </a:lnTo>
+                <a:lnTo>
+                  <a:pt x="430593" y="1674867"/>
+                </a:lnTo>
+                <a:lnTo>
+                  <a:pt x="469738" y="1662797"/>
+                </a:lnTo>
+                <a:lnTo>
+                  <a:pt x="508883" y="1649837"/>
+                </a:lnTo>
+                <a:lnTo>
+                  <a:pt x="548028" y="1636014"/>
+                </a:lnTo>
+                <a:lnTo>
+                  <a:pt x="587173" y="1621352"/>
+                </a:lnTo>
+                <a:lnTo>
+                  <a:pt x="626318" y="1605878"/>
+                </a:lnTo>
+                <a:lnTo>
+                  <a:pt x="665463" y="1589616"/>
+                </a:lnTo>
+                <a:lnTo>
+                  <a:pt x="704607" y="1572593"/>
+                </a:lnTo>
+                <a:lnTo>
+                  <a:pt x="743752" y="1554835"/>
+                </a:lnTo>
+                <a:lnTo>
+                  <a:pt x="782897" y="1536366"/>
+                </a:lnTo>
+                <a:lnTo>
+                  <a:pt x="822042" y="1517213"/>
+                </a:lnTo>
+                <a:lnTo>
+                  <a:pt x="861187" y="1497400"/>
+                </a:lnTo>
+                <a:lnTo>
+                  <a:pt x="900332" y="1476955"/>
+                </a:lnTo>
+                <a:lnTo>
+                  <a:pt x="939477" y="1455901"/>
+                </a:lnTo>
+                <a:lnTo>
+                  <a:pt x="978622" y="1434266"/>
+                </a:lnTo>
+                <a:lnTo>
+                  <a:pt x="1017766" y="1412074"/>
+                </a:lnTo>
+                <a:lnTo>
+                  <a:pt x="1056911" y="1389351"/>
+                </a:lnTo>
+                <a:lnTo>
+                  <a:pt x="1096056" y="1366124"/>
+                </a:lnTo>
+                <a:lnTo>
+                  <a:pt x="1135201" y="1342416"/>
+                </a:lnTo>
+                <a:lnTo>
+                  <a:pt x="1174346" y="1318255"/>
+                </a:lnTo>
+                <a:lnTo>
+                  <a:pt x="1213491" y="1293665"/>
+                </a:lnTo>
+                <a:lnTo>
+                  <a:pt x="1252636" y="1268672"/>
+                </a:lnTo>
+                <a:lnTo>
+                  <a:pt x="1291781" y="1243303"/>
+                </a:lnTo>
+                <a:lnTo>
+                  <a:pt x="1330926" y="1217581"/>
+                </a:lnTo>
+                <a:lnTo>
+                  <a:pt x="1370070" y="1191535"/>
+                </a:lnTo>
+                <a:lnTo>
+                  <a:pt x="1409215" y="1165187"/>
+                </a:lnTo>
+                <a:lnTo>
+                  <a:pt x="1448360" y="1138565"/>
+                </a:lnTo>
+                <a:lnTo>
+                  <a:pt x="1487505" y="1111695"/>
+                </a:lnTo>
+                <a:lnTo>
+                  <a:pt x="1526650" y="1084600"/>
+                </a:lnTo>
+                <a:lnTo>
+                  <a:pt x="1565795" y="1057308"/>
+                </a:lnTo>
+                <a:lnTo>
+                  <a:pt x="1604940" y="1029844"/>
+                </a:lnTo>
+                <a:lnTo>
+                  <a:pt x="1644085" y="1002233"/>
+                </a:lnTo>
+                <a:lnTo>
+                  <a:pt x="1683229" y="974502"/>
+                </a:lnTo>
+                <a:lnTo>
+                  <a:pt x="1722374" y="946675"/>
+                </a:lnTo>
+                <a:lnTo>
+                  <a:pt x="1761519" y="918779"/>
+                </a:lnTo>
+                <a:lnTo>
+                  <a:pt x="1800664" y="890838"/>
+                </a:lnTo>
+                <a:lnTo>
+                  <a:pt x="1839809" y="862879"/>
+                </a:lnTo>
+                <a:lnTo>
+                  <a:pt x="1878954" y="834927"/>
+                </a:lnTo>
+                <a:lnTo>
+                  <a:pt x="1918099" y="807008"/>
+                </a:lnTo>
+                <a:lnTo>
+                  <a:pt x="1957244" y="779148"/>
+                </a:lnTo>
+                <a:lnTo>
+                  <a:pt x="1996389" y="751372"/>
+                </a:lnTo>
+                <a:lnTo>
+                  <a:pt x="2035533" y="723705"/>
+                </a:lnTo>
+                <a:lnTo>
+                  <a:pt x="2074678" y="696173"/>
+                </a:lnTo>
+                <a:lnTo>
+                  <a:pt x="2113823" y="668803"/>
+                </a:lnTo>
+                <a:lnTo>
+                  <a:pt x="2152968" y="641619"/>
+                </a:lnTo>
+                <a:lnTo>
+                  <a:pt x="2192113" y="614647"/>
+                </a:lnTo>
+                <a:lnTo>
+                  <a:pt x="2231258" y="587913"/>
+                </a:lnTo>
+                <a:lnTo>
+                  <a:pt x="2270403" y="561443"/>
+                </a:lnTo>
+                <a:lnTo>
+                  <a:pt x="2309548" y="535261"/>
+                </a:lnTo>
+                <a:lnTo>
+                  <a:pt x="2348692" y="509394"/>
+                </a:lnTo>
+                <a:lnTo>
+                  <a:pt x="2387837" y="483868"/>
+                </a:lnTo>
+                <a:lnTo>
+                  <a:pt x="2426982" y="458707"/>
+                </a:lnTo>
+                <a:lnTo>
+                  <a:pt x="2466127" y="433938"/>
+                </a:lnTo>
+                <a:lnTo>
+                  <a:pt x="2505272" y="409586"/>
+                </a:lnTo>
+                <a:lnTo>
+                  <a:pt x="2544417" y="385677"/>
+                </a:lnTo>
+                <a:lnTo>
+                  <a:pt x="2583562" y="362236"/>
+                </a:lnTo>
+                <a:lnTo>
+                  <a:pt x="2622707" y="339289"/>
+                </a:lnTo>
+                <a:lnTo>
+                  <a:pt x="2661852" y="316862"/>
+                </a:lnTo>
+                <a:lnTo>
+                  <a:pt x="2700996" y="294980"/>
+                </a:lnTo>
+                <a:lnTo>
+                  <a:pt x="2740141" y="273669"/>
+                </a:lnTo>
+                <a:lnTo>
+                  <a:pt x="2779286" y="252954"/>
+                </a:lnTo>
+                <a:lnTo>
+                  <a:pt x="2818431" y="232862"/>
+                </a:lnTo>
+                <a:lnTo>
+                  <a:pt x="2857576" y="213417"/>
+                </a:lnTo>
+                <a:lnTo>
+                  <a:pt x="2896721" y="194645"/>
+                </a:lnTo>
+                <a:lnTo>
+                  <a:pt x="2935866" y="176573"/>
+                </a:lnTo>
+                <a:lnTo>
+                  <a:pt x="2975011" y="159225"/>
+                </a:lnTo>
+                <a:lnTo>
+                  <a:pt x="3014155" y="142627"/>
+                </a:lnTo>
+                <a:lnTo>
+                  <a:pt x="3053300" y="126805"/>
+                </a:lnTo>
+                <a:lnTo>
+                  <a:pt x="3092445" y="111785"/>
+                </a:lnTo>
+                <a:lnTo>
+                  <a:pt x="3131590" y="97592"/>
+                </a:lnTo>
+                <a:lnTo>
+                  <a:pt x="3170735" y="84251"/>
+                </a:lnTo>
+                <a:lnTo>
+                  <a:pt x="3209880" y="71789"/>
+                </a:lnTo>
+                <a:lnTo>
+                  <a:pt x="3249025" y="60230"/>
+                </a:lnTo>
+                <a:lnTo>
+                  <a:pt x="3288170" y="49602"/>
+                </a:lnTo>
+                <a:lnTo>
+                  <a:pt x="3327315" y="39928"/>
+                </a:lnTo>
+                <a:lnTo>
+                  <a:pt x="3366459" y="31235"/>
+                </a:lnTo>
+                <a:lnTo>
+                  <a:pt x="3405604" y="23549"/>
+                </a:lnTo>
+                <a:lnTo>
+                  <a:pt x="3444749" y="16894"/>
+                </a:lnTo>
+                <a:lnTo>
+                  <a:pt x="3483894" y="11298"/>
+                </a:lnTo>
+                <a:lnTo>
+                  <a:pt x="3523039" y="6784"/>
+                </a:lnTo>
+                <a:lnTo>
+                  <a:pt x="3562184" y="3380"/>
+                </a:lnTo>
+                <a:lnTo>
+                  <a:pt x="3601329" y="1110"/>
+                </a:lnTo>
+                <a:lnTo>
+                  <a:pt x="3640474" y="0"/>
+                </a:lnTo>
+                <a:lnTo>
+                  <a:pt x="3679618" y="76"/>
+                </a:lnTo>
+                <a:lnTo>
+                  <a:pt x="3718763" y="1363"/>
+                </a:lnTo>
+                <a:lnTo>
+                  <a:pt x="3757908" y="3888"/>
+                </a:lnTo>
+                <a:lnTo>
+                  <a:pt x="3797053" y="7675"/>
+                </a:lnTo>
+                <a:lnTo>
+                  <a:pt x="3836198" y="12750"/>
+                </a:lnTo>
+                <a:lnTo>
+                  <a:pt x="3875343" y="19139"/>
+                </a:lnTo>
+                <a:lnTo>
+                  <a:pt x="3914488" y="26867"/>
+                </a:lnTo>
+                <a:lnTo>
+                  <a:pt x="3953633" y="35961"/>
+                </a:lnTo>
+                <a:lnTo>
+                  <a:pt x="3992778" y="46445"/>
+                </a:lnTo>
+                <a:lnTo>
+                  <a:pt x="4031922" y="58346"/>
+                </a:lnTo>
+                <a:lnTo>
+                  <a:pt x="4071067" y="71689"/>
+                </a:lnTo>
+                <a:lnTo>
+                  <a:pt x="4110212" y="86499"/>
+                </a:lnTo>
+                <a:lnTo>
+                  <a:pt x="4149357" y="102803"/>
+                </a:lnTo>
+                <a:lnTo>
+                  <a:pt x="4188502" y="120625"/>
+                </a:lnTo>
+                <a:lnTo>
+                  <a:pt x="4227647" y="139992"/>
+                </a:lnTo>
+                <a:lnTo>
+                  <a:pt x="4266792" y="160929"/>
+                </a:lnTo>
+                <a:lnTo>
+                  <a:pt x="4305937" y="183462"/>
+                </a:lnTo>
+                <a:lnTo>
+                  <a:pt x="4345082" y="207616"/>
+                </a:lnTo>
+                <a:lnTo>
+                  <a:pt x="4384226" y="233417"/>
+                </a:lnTo>
+                <a:lnTo>
+                  <a:pt x="4423371" y="260890"/>
+                </a:lnTo>
+                <a:lnTo>
+                  <a:pt x="4462516" y="290062"/>
+                </a:lnTo>
+                <a:lnTo>
+                  <a:pt x="4501661" y="320957"/>
+                </a:lnTo>
+                <a:lnTo>
+                  <a:pt x="4540806" y="353602"/>
+                </a:lnTo>
+                <a:lnTo>
+                  <a:pt x="4579951" y="388022"/>
+                </a:lnTo>
+                <a:lnTo>
+                  <a:pt x="4619096" y="424243"/>
+                </a:lnTo>
+                <a:lnTo>
+                  <a:pt x="4658241" y="462290"/>
+                </a:lnTo>
+                <a:lnTo>
+                  <a:pt x="4697385" y="502189"/>
+                </a:lnTo>
+                <a:lnTo>
+                  <a:pt x="4736530" y="543965"/>
+                </a:lnTo>
+                <a:lnTo>
+                  <a:pt x="4775675" y="587644"/>
+                </a:lnTo>
+                <a:lnTo>
+                  <a:pt x="4814820" y="633253"/>
+                </a:lnTo>
+                <a:lnTo>
+                  <a:pt x="4853965" y="680815"/>
+                </a:lnTo>
+                <a:lnTo>
+                  <a:pt x="4893110" y="730358"/>
+                </a:lnTo>
+                <a:lnTo>
+                  <a:pt x="4932255" y="781906"/>
+                </a:lnTo>
+                <a:lnTo>
+                  <a:pt x="4971400" y="835486"/>
+                </a:lnTo>
+                <a:lnTo>
+                  <a:pt x="5010545" y="891123"/>
+                </a:lnTo>
+                <a:lnTo>
+                  <a:pt x="5049689" y="948842"/>
+                </a:lnTo>
+                <a:lnTo>
+                  <a:pt x="5088834" y="1008669"/>
+                </a:lnTo>
+                <a:lnTo>
+                  <a:pt x="5127979" y="1070629"/>
+                </a:lnTo>
+                <a:lnTo>
+                  <a:pt x="5167124" y="1134750"/>
+                </a:lnTo>
+                <a:lnTo>
+                  <a:pt x="5206269" y="1201055"/>
+                </a:lnTo>
+                <a:lnTo>
+                  <a:pt x="5245414" y="1269571"/>
+                </a:lnTo>
+                <a:lnTo>
+                  <a:pt x="5284559" y="1340323"/>
+                </a:lnTo>
+                <a:lnTo>
+                  <a:pt x="5323704" y="1413336"/>
+                </a:lnTo>
+                <a:lnTo>
+                  <a:pt x="5362848" y="1488638"/>
+                </a:lnTo>
+                <a:lnTo>
+                  <a:pt x="5401993" y="1566252"/>
+                </a:lnTo>
+                <a:lnTo>
+                  <a:pt x="5441138" y="1646205"/>
+                </a:lnTo>
+                <a:lnTo>
+                  <a:pt x="5480283" y="1728523"/>
+                </a:lnTo>
+                <a:lnTo>
+                  <a:pt x="5519428" y="1813230"/>
+                </a:lnTo>
+                <a:lnTo>
+                  <a:pt x="5558573" y="1900353"/>
+                </a:lnTo>
+                <a:lnTo>
+                  <a:pt x="5597718" y="1989917"/>
+                </a:lnTo>
+                <a:lnTo>
+                  <a:pt x="5636863" y="2081948"/>
+                </a:lnTo>
+                <a:lnTo>
+                  <a:pt x="5676008" y="2176472"/>
+                </a:lnTo>
+                <a:lnTo>
+                  <a:pt x="5715152" y="2273513"/>
+                </a:lnTo>
+                <a:lnTo>
+                  <a:pt x="5754297" y="2373098"/>
+                </a:lnTo>
+                <a:lnTo>
+                  <a:pt x="5793442" y="2475253"/>
+                </a:lnTo>
+                <a:lnTo>
+                  <a:pt x="5832587" y="2580002"/>
+                </a:lnTo>
+                <a:lnTo>
+                  <a:pt x="5852160" y="2633358"/>
+                </a:lnTo>
+              </a:path>
+            </a:pathLst>
+          </a:custGeom>
+          <a:noFill/>
+          <a:ln w="43180">
+            <a:solidFill>
+              <a:srgbClr val="8EDBD4"/>
+            </a:solidFill>
+          </a:ln>
+          <a:effectLst/>
+        </p:spPr>
+        <p:txBody>
+          <a:bodyPr rtlCol="0" anchor="ctr"/>
+          <a:lstStyle/>
+          <a:p>
+            <a:pPr algn="ctr"/>
+          </a:p>
+        </p:txBody>
+      </p:sp>
+      <p:sp>
+        <p:nvSpPr>
+          <p:cNvPr id="35" name="C2-E14 ellipse 33" descr="sci-ppt:o033"/>
+          <p:cNvSpPr/>
+          <p:nvPr/>
+        </p:nvSpPr>
+        <p:spPr>
+          <a:xfrm>
+            <a:off x="4498848" y="1820962"/>
+            <a:ext cx="146304" cy="146304"/>
           </a:xfrm>
           <a:prstGeom prst="ellipse">
+            <a:avLst/>
+          </a:prstGeom>
+          <a:solidFill>
+            <a:srgbClr val="F2B880"/>
+          </a:solidFill>
+          <a:ln w="12700">
+            <a:solidFill>
+              <a:srgbClr val="F2B880"/>
+            </a:solidFill>
+          </a:ln>
+          <a:effectLst/>
+        </p:spPr>
+        <p:txBody>
+          <a:bodyPr rtlCol="0" anchor="ctr"/>
+          <a:lstStyle/>
+          <a:p>
+            <a:pPr algn="ctr"/>
+          </a:p>
+        </p:txBody>
+      </p:sp>
+      <p:cxnSp>
+        <p:nvCxnSpPr>
+          <p:cNvPr id="36" name="C2-E14 line 34" descr="sci-ppt:o034"/>
+          <p:cNvCxnSpPr/>
+          <p:nvPr/>
+        </p:nvCxnSpPr>
+        <p:spPr>
+          <a:xfrm>
+            <a:off x="4572000" y="1371600"/>
+            <a:ext cx="0" cy="3657600"/>
+          </a:xfrm>
+          <a:prstGeom prst="line">
+            <a:avLst/>
+          </a:prstGeom>
+          <a:ln w="16510">
+            <a:solidFill>
+              <a:srgbClr val="F2B880"/>
+            </a:solidFill>
+            <a:prstDash val="dash"/>
+          </a:ln>
+          <a:effectLst/>
+        </p:spPr>
+      </p:cxnSp>
+      <p:sp>
+        <p:nvSpPr>
+          <p:cNvPr id="37" name="C2-E14 text 35" descr="sci-ppt:o035"/>
+          <p:cNvSpPr txBox="1"/>
+          <p:nvPr/>
+        </p:nvSpPr>
+        <p:spPr>
+          <a:xfrm>
+            <a:off x="4663440" y="1436914"/>
+            <a:ext cx="2743200" cy="239395"/>
+          </a:xfrm>
+          <a:prstGeom prst="rect">
+            <a:avLst/>
+          </a:prstGeom>
+          <a:noFill/>
+          <a:effectLst/>
+        </p:spPr>
+        <p:txBody>
+          <a:bodyPr wrap="none" lIns="18288" rIns="18288" tIns="18288" bIns="18288" anchor="t">
+            <a:spAutoFit/>
+          </a:bodyPr>
+          <a:lstStyle/>
+          <a:p>
+            <a:pPr algn="l">
+              <a:spcAft>
+                <a:spcPts val="0"/>
+              </a:spcAft>
+            </a:pPr>
+            <a:r>
+              <a:rPr sz="1250" b="0" i="0">
+                <a:solidFill>
+                  <a:srgbClr val="F2B880"/>
+                </a:solidFill>
+                <a:latin typeface="Arial"/>
+              </a:rPr>
+              <a:t>barrier W* at r* = 2σ/Δpₙ</a:t>
+            </a:r>
+          </a:p>
+        </p:txBody>
+      </p:sp>
+      <p:sp>
+        <p:nvSpPr>
+          <p:cNvPr id="38" name="C2-E14 text 36" descr="sci-ppt:o036"/>
+          <p:cNvSpPr txBox="1"/>
+          <p:nvPr/>
+        </p:nvSpPr>
+        <p:spPr>
+          <a:xfrm>
+            <a:off x="1170432" y="1715588"/>
+            <a:ext cx="2743200" cy="223900"/>
+          </a:xfrm>
+          <a:prstGeom prst="rect">
+            <a:avLst/>
+          </a:prstGeom>
+          <a:noFill/>
+          <a:effectLst/>
+        </p:spPr>
+        <p:txBody>
+          <a:bodyPr wrap="none" lIns="18288" rIns="18288" tIns="18288" bIns="18288" anchor="t">
+            <a:spAutoFit/>
+          </a:bodyPr>
+          <a:lstStyle/>
+          <a:p>
+            <a:pPr algn="l">
+              <a:spcAft>
+                <a:spcPts val="0"/>
+              </a:spcAft>
+            </a:pPr>
+            <a:r>
+              <a:rPr sz="1150" b="0" i="0">
+                <a:solidFill>
+                  <a:srgbClr val="F28BA0"/>
+                </a:solidFill>
+                <a:latin typeface="Arial"/>
+              </a:rPr>
+              <a:t>surface cost 4πσr² (grows as r²)</a:t>
+            </a:r>
+          </a:p>
+        </p:txBody>
+      </p:sp>
+      <p:sp>
+        <p:nvSpPr>
+          <p:cNvPr id="39" name="C2-E14 text 37" descr="sci-ppt:o037"/>
+          <p:cNvSpPr txBox="1"/>
+          <p:nvPr/>
+        </p:nvSpPr>
+        <p:spPr>
+          <a:xfrm>
+            <a:off x="3182112" y="4502331"/>
+            <a:ext cx="2743200" cy="223900"/>
+          </a:xfrm>
+          <a:prstGeom prst="rect">
+            <a:avLst/>
+          </a:prstGeom>
+          <a:noFill/>
+          <a:effectLst/>
+        </p:spPr>
+        <p:txBody>
+          <a:bodyPr wrap="none" lIns="18288" rIns="18288" tIns="18288" bIns="18288" anchor="t">
+            <a:spAutoFit/>
+          </a:bodyPr>
+          <a:lstStyle/>
+          <a:p>
+            <a:pPr algn="l">
+              <a:spcAft>
+                <a:spcPts val="0"/>
+              </a:spcAft>
+            </a:pPr>
+            <a:r>
+              <a:rPr sz="1150" b="0" i="0">
+                <a:solidFill>
+                  <a:srgbClr val="7FC8F8"/>
+                </a:solidFill>
+                <a:latin typeface="Arial"/>
+              </a:rPr>
+              <a:t>volume gain −(4π/3)Δpₙ r³</a:t>
+            </a:r>
+          </a:p>
+        </p:txBody>
+      </p:sp>
+      <p:sp>
+        <p:nvSpPr>
+          <p:cNvPr id="40" name="C2-E14 text 38" descr="sci-ppt:o038"/>
+          <p:cNvSpPr txBox="1"/>
+          <p:nvPr/>
+        </p:nvSpPr>
+        <p:spPr>
+          <a:xfrm>
+            <a:off x="5212079" y="2934788"/>
+            <a:ext cx="914400" cy="247142"/>
+          </a:xfrm>
+          <a:prstGeom prst="rect">
+            <a:avLst/>
+          </a:prstGeom>
+          <a:noFill/>
+          <a:effectLst/>
+        </p:spPr>
+        <p:txBody>
+          <a:bodyPr wrap="none" lIns="18288" rIns="18288" tIns="18288" bIns="18288" anchor="t">
+            <a:spAutoFit/>
+          </a:bodyPr>
+          <a:lstStyle/>
+          <a:p>
+            <a:pPr algn="l">
+              <a:spcAft>
+                <a:spcPts val="0"/>
+              </a:spcAft>
+            </a:pPr>
+            <a:r>
+              <a:rPr sz="1300" b="0" i="0">
+                <a:solidFill>
+                  <a:srgbClr val="8EDBD4"/>
+                </a:solidFill>
+                <a:latin typeface="Arial"/>
+              </a:rPr>
+              <a:t>net W</a:t>
+            </a:r>
+          </a:p>
+        </p:txBody>
+      </p:sp>
+      <p:sp>
+        <p:nvSpPr>
+          <p:cNvPr id="41" name="C2-E14 round_rect 39" descr="sci-ppt:o039"/>
+          <p:cNvSpPr/>
+          <p:nvPr/>
+        </p:nvSpPr>
+        <p:spPr>
+          <a:xfrm>
+            <a:off x="7040880" y="1371600"/>
+            <a:ext cx="4800600" cy="3657600"/>
+          </a:xfrm>
+          <a:prstGeom prst="roundRect">
             <a:avLst/>
           </a:prstGeom>
           <a:solidFill>
             <a:srgbClr val="213E4B"/>
           </a:solidFill>
-          <a:ln w="21590">
+          <a:ln w="20320">
             <a:solidFill>
-              <a:srgbClr val="B4C7D2"/>
+              <a:srgbClr val="8EDBD4"/>
             </a:solidFill>
           </a:ln>
           <a:effectLst/>
@@ -3170,46 +5165,14 @@
       </p:sp>
       <p:sp>
         <p:nvSpPr>
-          <p:cNvPr id="4" name="ellipse3" descr="sci-ppt:C2-E14-003"/>
-          <p:cNvSpPr/>
-          <p:nvPr/>
-        </p:nvSpPr>
-        <p:spPr>
-          <a:xfrm>
-            <a:off x="2389632" y="2328672"/>
-            <a:ext cx="707136" cy="707136"/>
-          </a:xfrm>
-          <a:prstGeom prst="ellipse">
-            <a:avLst/>
-          </a:prstGeom>
-          <a:solidFill>
-            <a:srgbClr val="F6BC77"/>
-          </a:solidFill>
-          <a:ln w="21590">
-            <a:solidFill>
-              <a:srgbClr val="B4C7D2"/>
-            </a:solidFill>
-          </a:ln>
-          <a:effectLst/>
-        </p:spPr>
-        <p:txBody>
-          <a:bodyPr rtlCol="0" anchor="ctr"/>
-          <a:lstStyle/>
-          <a:p>
-            <a:pPr algn="ctr"/>
-          </a:p>
-        </p:txBody>
-      </p:sp>
-      <p:sp>
-        <p:nvSpPr>
-          <p:cNvPr id="5" name="text4" descr="sci-ppt:C2-E14-004"/>
+          <p:cNvPr id="42" name="C2-E14 text 40" descr="sci-ppt:o040"/>
           <p:cNvSpPr txBox="1"/>
           <p:nvPr/>
         </p:nvSpPr>
         <p:spPr>
           <a:xfrm>
-            <a:off x="1706880" y="853440"/>
-            <a:ext cx="4876800" cy="359054"/>
+            <a:off x="7150608" y="1426464"/>
+            <a:ext cx="4581144" cy="254889"/>
           </a:xfrm>
           <a:prstGeom prst="rect">
             <a:avLst/>
@@ -3218,7 +5181,7 @@
           <a:effectLst/>
         </p:spPr>
         <p:txBody>
-          <a:bodyPr wrap="none" lIns="27432" rIns="27432" tIns="18288" bIns="18288" anchor="ctr">
+          <a:bodyPr wrap="none" lIns="18288" rIns="18288" tIns="18288" bIns="18288" anchor="t">
             <a:spAutoFit/>
           </a:bodyPr>
           <a:lstStyle/>
@@ -3229,27 +5192,67 @@
               </a:spcAft>
             </a:pPr>
             <a:r>
-              <a:rPr sz="1823" b="0" i="0">
+              <a:rPr sz="1350" b="1" i="0">
+                <a:solidFill>
+                  <a:srgbClr val="8EDBD4"/>
+                </a:solidFill>
+                <a:latin typeface="Arial"/>
+              </a:rPr>
+              <a:t>A new interface costs energy first</a:t>
+            </a:r>
+          </a:p>
+        </p:txBody>
+      </p:sp>
+      <p:sp>
+        <p:nvSpPr>
+          <p:cNvPr id="43" name="C2-E14 text 41" descr="sci-ppt:o041"/>
+          <p:cNvSpPr txBox="1"/>
+          <p:nvPr/>
+        </p:nvSpPr>
+        <p:spPr>
+          <a:xfrm>
+            <a:off x="7178040" y="1828800"/>
+            <a:ext cx="4572000" cy="247142"/>
+          </a:xfrm>
+          <a:prstGeom prst="rect">
+            <a:avLst/>
+          </a:prstGeom>
+          <a:noFill/>
+          <a:effectLst/>
+        </p:spPr>
+        <p:txBody>
+          <a:bodyPr wrap="none" lIns="18288" rIns="18288" tIns="18288" bIns="18288" anchor="t">
+            <a:spAutoFit/>
+          </a:bodyPr>
+          <a:lstStyle/>
+          <a:p>
+            <a:pPr algn="l">
+              <a:spcAft>
+                <a:spcPts val="0"/>
+              </a:spcAft>
+            </a:pPr>
+            <a:r>
+              <a:rPr sz="1300" b="1" i="0">
                 <a:solidFill>
                   <a:srgbClr val="E7F0F3"/>
                 </a:solidFill>
                 <a:latin typeface="Arial"/>
               </a:rPr>
-              <a:t>Finite PFC liquid: p_d</a:t>
-            </a:r>
-          </a:p>
-        </p:txBody>
-      </p:sp>
-      <p:sp>
-        <p:nvSpPr>
-          <p:cNvPr id="6" name="text5" descr="sci-ppt:C2-E14-005"/>
+              <a:t>W(rₙ) = 4πσᵥₚ rₙ² − (4π/3) Δpₙ rₙ³</a:t>
+            </a:r>
+          </a:p>
+        </p:txBody>
+      </p:sp>
+      <p:sp>
+        <p:nvSpPr>
+          <p:cNvPr id="44" name="C2-E14 text 42" descr="sci-ppt:o042"/>
           <p:cNvSpPr txBox="1"/>
           <p:nvPr/>
         </p:nvSpPr>
         <p:spPr>
           <a:xfrm>
-            <a:off x="1341120" y="4267200"/>
-            <a:ext cx="5608320" cy="321259"/>
+            <a:off x="7379208" y="2423160"/>
+            <a:ext cx="4370832" cy="239395"/>
           </a:xfrm>
           <a:prstGeom prst="rect">
             <a:avLst/>
@@ -3258,7 +5261,7 @@
           <a:effectLst/>
         </p:spPr>
         <p:txBody>
-          <a:bodyPr wrap="none" lIns="27432" rIns="27432" tIns="18288" bIns="18288" anchor="ctr">
+          <a:bodyPr wrap="none" lIns="18288" rIns="18288" tIns="18288" bIns="18288" anchor="t">
             <a:spAutoFit/>
           </a:bodyPr>
           <a:lstStyle/>
@@ -3269,75 +5272,59 @@
               </a:spcAft>
             </a:pPr>
             <a:r>
-              <a:rPr sz="1632" b="0" i="0">
+              <a:rPr sz="1250" b="0" i="0">
                 <a:solidFill>
                   <a:srgbClr val="E7F0F3"/>
                 </a:solidFill>
                 <a:latin typeface="Arial"/>
               </a:rPr>
-              <a:t>Inner interface σ_vp; outer σ_pc</a:t>
-            </a:r>
-          </a:p>
-        </p:txBody>
-      </p:sp>
-      <p:cxnSp>
-        <p:nvCxnSpPr>
-          <p:cNvPr id="7" name="arrow6" descr="sci-ppt:C2-E14-006"/>
-          <p:cNvCxnSpPr/>
+              <a:t>Small nuclei: surface term wins, W rises.</a:t>
+            </a:r>
+          </a:p>
+        </p:txBody>
+      </p:sp>
+      <p:sp>
+        <p:nvSpPr>
+          <p:cNvPr id="45" name="C2-E14 ellipse 43" descr="sci-ppt:o043"/>
+          <p:cNvSpPr/>
           <p:nvPr/>
-        </p:nvCxnSpPr>
-        <p:spPr>
-          <a:xfrm>
-            <a:off x="6705600" y="3901440"/>
-            <a:ext cx="4267200" cy="0"/>
-          </a:xfrm>
-          <a:prstGeom prst="line">
+        </p:nvSpPr>
+        <p:spPr>
+          <a:xfrm>
+            <a:off x="7210044" y="2480437"/>
+            <a:ext cx="82296" cy="82296"/>
+          </a:xfrm>
+          <a:prstGeom prst="ellipse">
             <a:avLst/>
           </a:prstGeom>
-          <a:ln w="25400">
+          <a:solidFill>
+            <a:srgbClr val="8EDBD4"/>
+          </a:solidFill>
+          <a:ln w="12700">
             <a:solidFill>
               <a:srgbClr val="8EDBD4"/>
             </a:solidFill>
-            <a:headEnd type="none" w="med" len="med"/>
-            <a:tailEnd type="triangle" w="med" len="med"/>
           </a:ln>
           <a:effectLst/>
         </p:spPr>
-      </p:cxnSp>
-      <p:cxnSp>
-        <p:nvCxnSpPr>
-          <p:cNvPr id="8" name="arrow7" descr="sci-ppt:C2-E14-007"/>
-          <p:cNvCxnSpPr/>
-          <p:nvPr/>
-        </p:nvCxnSpPr>
-        <p:spPr>
-          <a:xfrm flipV="1">
-            <a:off x="6705600" y="1463040"/>
-            <a:ext cx="0" cy="2438400"/>
-          </a:xfrm>
-          <a:prstGeom prst="line">
-            <a:avLst/>
-          </a:prstGeom>
-          <a:ln w="25400">
-            <a:solidFill>
-              <a:srgbClr val="8EDBD4"/>
-            </a:solidFill>
-            <a:headEnd type="none" w="med" len="med"/>
-            <a:tailEnd type="triangle" w="med" len="med"/>
-          </a:ln>
-          <a:effectLst/>
-        </p:spPr>
-      </p:cxnSp>
-      <p:sp>
-        <p:nvSpPr>
-          <p:cNvPr id="9" name="text8" descr="sci-ppt:C2-E14-008"/>
+        <p:txBody>
+          <a:bodyPr rtlCol="0" anchor="ctr"/>
+          <a:lstStyle/>
+          <a:p>
+            <a:pPr algn="ctr"/>
+          </a:p>
+        </p:txBody>
+      </p:sp>
+      <p:sp>
+        <p:nvSpPr>
+          <p:cNvPr id="46" name="C2-E14 text 44" descr="sci-ppt:o044"/>
           <p:cNvSpPr txBox="1"/>
           <p:nvPr/>
         </p:nvSpPr>
         <p:spPr>
           <a:xfrm>
-            <a:off x="9997440" y="4023360"/>
-            <a:ext cx="1828800" cy="321259"/>
+            <a:off x="7379208" y="2708275"/>
+            <a:ext cx="4370832" cy="239395"/>
           </a:xfrm>
           <a:prstGeom prst="rect">
             <a:avLst/>
@@ -3346,7 +5333,7 @@
           <a:effectLst/>
         </p:spPr>
         <p:txBody>
-          <a:bodyPr wrap="none" lIns="27432" rIns="27432" tIns="18288" bIns="18288" anchor="ctr">
+          <a:bodyPr wrap="none" lIns="18288" rIns="18288" tIns="18288" bIns="18288" anchor="t">
             <a:spAutoFit/>
           </a:bodyPr>
           <a:lstStyle/>
@@ -3357,27 +5344,59 @@
               </a:spcAft>
             </a:pPr>
             <a:r>
-              <a:rPr sz="1632" b="0" i="0">
+              <a:rPr sz="1250" b="0" i="0">
                 <a:solidFill>
                   <a:srgbClr val="E7F0F3"/>
                 </a:solidFill>
                 <a:latin typeface="Arial"/>
               </a:rPr>
-              <a:t>r_n</a:t>
-            </a:r>
-          </a:p>
-        </p:txBody>
-      </p:sp>
-      <p:sp>
-        <p:nvSpPr>
-          <p:cNvPr id="10" name="text9" descr="sci-ppt:C2-E14-009"/>
+              <a:t>Large nuclei: volume term wins, W falls.</a:t>
+            </a:r>
+          </a:p>
+        </p:txBody>
+      </p:sp>
+      <p:sp>
+        <p:nvSpPr>
+          <p:cNvPr id="47" name="C2-E14 ellipse 45" descr="sci-ppt:o045"/>
+          <p:cNvSpPr/>
+          <p:nvPr/>
+        </p:nvSpPr>
+        <p:spPr>
+          <a:xfrm>
+            <a:off x="7210044" y="2765552"/>
+            <a:ext cx="82296" cy="82296"/>
+          </a:xfrm>
+          <a:prstGeom prst="ellipse">
+            <a:avLst/>
+          </a:prstGeom>
+          <a:solidFill>
+            <a:srgbClr val="8EDBD4"/>
+          </a:solidFill>
+          <a:ln w="12700">
+            <a:solidFill>
+              <a:srgbClr val="8EDBD4"/>
+            </a:solidFill>
+          </a:ln>
+          <a:effectLst/>
+        </p:spPr>
+        <p:txBody>
+          <a:bodyPr rtlCol="0" anchor="ctr"/>
+          <a:lstStyle/>
+          <a:p>
+            <a:pPr algn="ctr"/>
+          </a:p>
+        </p:txBody>
+      </p:sp>
+      <p:sp>
+        <p:nvSpPr>
+          <p:cNvPr id="48" name="C2-E14 text 46" descr="sci-ppt:o046"/>
           <p:cNvSpPr txBox="1"/>
           <p:nvPr/>
         </p:nvSpPr>
         <p:spPr>
           <a:xfrm>
-            <a:off x="6583680" y="1097280"/>
-            <a:ext cx="3657600" cy="321259"/>
+            <a:off x="7379208" y="2993389"/>
+            <a:ext cx="4370832" cy="433070"/>
           </a:xfrm>
           <a:prstGeom prst="rect">
             <a:avLst/>
@@ -3386,7 +5405,7 @@
           <a:effectLst/>
         </p:spPr>
         <p:txBody>
-          <a:bodyPr wrap="none" lIns="27432" rIns="27432" tIns="18288" bIns="18288" anchor="ctr">
+          <a:bodyPr wrap="none" lIns="18288" rIns="18288" tIns="18288" bIns="18288" anchor="t">
             <a:spAutoFit/>
           </a:bodyPr>
           <a:lstStyle/>
@@ -3397,907 +5416,163 @@
               </a:spcAft>
             </a:pPr>
             <a:r>
-              <a:rPr sz="1632" b="0" i="0">
+              <a:rPr sz="1250" b="0" i="0">
                 <a:solidFill>
                   <a:srgbClr val="E7F0F3"/>
                 </a:solidFill>
                 <a:latin typeface="Arial"/>
               </a:rPr>
-              <a:t>W</a:t>
-            </a:r>
-          </a:p>
-        </p:txBody>
-      </p:sp>
-      <p:cxnSp>
-        <p:nvCxnSpPr>
-          <p:cNvPr id="11" name="line10" descr="sci-ppt:C2-E14-010"/>
-          <p:cNvCxnSpPr/>
+              <a:t>The crossover is a barrier: a nucleus must reach r*</a:t>
+            </a:r>
+          </a:p>
+          <a:p>
+            <a:pPr algn="l">
+              <a:spcAft>
+                <a:spcPts val="0"/>
+              </a:spcAft>
+            </a:pPr>
+            <a:r>
+              <a:rPr sz="1250" b="0" i="0">
+                <a:solidFill>
+                  <a:srgbClr val="E7F0F3"/>
+                </a:solidFill>
+                <a:latin typeface="Arial"/>
+              </a:rPr>
+              <a:t>before growth lowers its energy.</a:t>
+            </a:r>
+          </a:p>
+        </p:txBody>
+      </p:sp>
+      <p:sp>
+        <p:nvSpPr>
+          <p:cNvPr id="49" name="C2-E14 ellipse 47" descr="sci-ppt:o047"/>
+          <p:cNvSpPr/>
           <p:nvPr/>
-        </p:nvCxnSpPr>
-        <p:spPr>
-          <a:xfrm flipV="1">
-            <a:off x="6766560" y="3896425"/>
-            <a:ext cx="100584" cy="5015"/>
-          </a:xfrm>
-          <a:prstGeom prst="line">
+        </p:nvSpPr>
+        <p:spPr>
+          <a:xfrm>
+            <a:off x="7210044" y="3050666"/>
+            <a:ext cx="82296" cy="82296"/>
+          </a:xfrm>
+          <a:prstGeom prst="ellipse">
             <a:avLst/>
           </a:prstGeom>
-          <a:ln w="25400">
+          <a:solidFill>
+            <a:srgbClr val="8EDBD4"/>
+          </a:solidFill>
+          <a:ln w="12700">
             <a:solidFill>
               <a:srgbClr val="8EDBD4"/>
             </a:solidFill>
           </a:ln>
           <a:effectLst/>
         </p:spPr>
-      </p:cxnSp>
-      <p:cxnSp>
-        <p:nvCxnSpPr>
-          <p:cNvPr id="12" name="line11" descr="sci-ppt:C2-E14-011"/>
-          <p:cNvCxnSpPr/>
+        <p:txBody>
+          <a:bodyPr rtlCol="0" anchor="ctr"/>
+          <a:lstStyle/>
+          <a:p>
+            <a:pPr algn="ctr"/>
+          </a:p>
+        </p:txBody>
+      </p:sp>
+      <p:sp>
+        <p:nvSpPr>
+          <p:cNvPr id="50" name="C2-E14 text 48" descr="sci-ppt:o048"/>
+          <p:cNvSpPr txBox="1"/>
           <p:nvPr/>
-        </p:nvCxnSpPr>
-        <p:spPr>
-          <a:xfrm flipV="1">
-            <a:off x="6867144" y="3881894"/>
-            <a:ext cx="100584" cy="14531"/>
-          </a:xfrm>
-          <a:prstGeom prst="line">
+        </p:nvSpPr>
+        <p:spPr>
+          <a:xfrm>
+            <a:off x="7379208" y="3472179"/>
+            <a:ext cx="4370832" cy="433070"/>
+          </a:xfrm>
+          <a:prstGeom prst="rect">
             <a:avLst/>
           </a:prstGeom>
-          <a:ln w="25400">
+          <a:noFill/>
+          <a:effectLst/>
+        </p:spPr>
+        <p:txBody>
+          <a:bodyPr wrap="none" lIns="18288" rIns="18288" tIns="18288" bIns="18288" anchor="t">
+            <a:spAutoFit/>
+          </a:bodyPr>
+          <a:lstStyle/>
+          <a:p>
+            <a:pPr algn="l">
+              <a:spcAft>
+                <a:spcPts val="0"/>
+              </a:spcAft>
+            </a:pPr>
+            <a:r>
+              <a:rPr sz="1250" b="0" i="0">
+                <a:solidFill>
+                  <a:srgbClr val="E7F0F3"/>
+                </a:solidFill>
+                <a:latin typeface="Arial"/>
+              </a:rPr>
+              <a:t>Δpₙ = pₛₐₜ(Tᵢ) − p_d is the superheat that drives</a:t>
+            </a:r>
+          </a:p>
+          <a:p>
+            <a:pPr algn="l">
+              <a:spcAft>
+                <a:spcPts val="0"/>
+              </a:spcAft>
+            </a:pPr>
+            <a:r>
+              <a:rPr sz="1250" b="0" i="0">
+                <a:solidFill>
+                  <a:srgbClr val="E7F0F3"/>
+                </a:solidFill>
+                <a:latin typeface="Arial"/>
+              </a:rPr>
+              <a:t>the volume gain.</a:t>
+            </a:r>
+          </a:p>
+        </p:txBody>
+      </p:sp>
+      <p:sp>
+        <p:nvSpPr>
+          <p:cNvPr id="51" name="C2-E14 ellipse 49" descr="sci-ppt:o049"/>
+          <p:cNvSpPr/>
+          <p:nvPr/>
+        </p:nvSpPr>
+        <p:spPr>
+          <a:xfrm>
+            <a:off x="7210044" y="3529456"/>
+            <a:ext cx="82296" cy="82296"/>
+          </a:xfrm>
+          <a:prstGeom prst="ellipse">
+            <a:avLst/>
+          </a:prstGeom>
+          <a:solidFill>
+            <a:srgbClr val="8EDBD4"/>
+          </a:solidFill>
+          <a:ln w="12700">
             <a:solidFill>
               <a:srgbClr val="8EDBD4"/>
             </a:solidFill>
           </a:ln>
           <a:effectLst/>
         </p:spPr>
-      </p:cxnSp>
-      <p:cxnSp>
-        <p:nvCxnSpPr>
-          <p:cNvPr id="13" name="line12" descr="sci-ppt:C2-E14-012"/>
-          <p:cNvCxnSpPr/>
-          <p:nvPr/>
-        </p:nvCxnSpPr>
-        <p:spPr>
-          <a:xfrm flipV="1">
-            <a:off x="6967728" y="3858620"/>
-            <a:ext cx="100584" cy="23274"/>
-          </a:xfrm>
-          <a:prstGeom prst="line">
-            <a:avLst/>
-          </a:prstGeom>
-          <a:ln w="25400">
-            <a:solidFill>
-              <a:srgbClr val="8EDBD4"/>
-            </a:solidFill>
-          </a:ln>
-          <a:effectLst/>
-        </p:spPr>
-      </p:cxnSp>
-      <p:cxnSp>
-        <p:nvCxnSpPr>
-          <p:cNvPr id="14" name="line13" descr="sci-ppt:C2-E14-013"/>
-          <p:cNvCxnSpPr/>
-          <p:nvPr/>
-        </p:nvCxnSpPr>
-        <p:spPr>
-          <a:xfrm flipV="1">
-            <a:off x="7068312" y="3827373"/>
-            <a:ext cx="100584" cy="31247"/>
-          </a:xfrm>
-          <a:prstGeom prst="line">
-            <a:avLst/>
-          </a:prstGeom>
-          <a:ln w="25400">
-            <a:solidFill>
-              <a:srgbClr val="8EDBD4"/>
-            </a:solidFill>
-          </a:ln>
-          <a:effectLst/>
-        </p:spPr>
-      </p:cxnSp>
-      <p:cxnSp>
-        <p:nvCxnSpPr>
-          <p:cNvPr id="15" name="line14" descr="sci-ppt:C2-E14-014"/>
-          <p:cNvCxnSpPr/>
-          <p:nvPr/>
-        </p:nvCxnSpPr>
-        <p:spPr>
-          <a:xfrm flipV="1">
-            <a:off x="7168896" y="3788925"/>
-            <a:ext cx="100584" cy="38448"/>
-          </a:xfrm>
-          <a:prstGeom prst="line">
-            <a:avLst/>
-          </a:prstGeom>
-          <a:ln w="25400">
-            <a:solidFill>
-              <a:srgbClr val="8EDBD4"/>
-            </a:solidFill>
-          </a:ln>
-          <a:effectLst/>
-        </p:spPr>
-      </p:cxnSp>
-      <p:cxnSp>
-        <p:nvCxnSpPr>
-          <p:cNvPr id="16" name="line15" descr="sci-ppt:C2-E14-015"/>
-          <p:cNvCxnSpPr/>
-          <p:nvPr/>
-        </p:nvCxnSpPr>
-        <p:spPr>
-          <a:xfrm flipV="1">
-            <a:off x="7269480" y="3744048"/>
-            <a:ext cx="100584" cy="44877"/>
-          </a:xfrm>
-          <a:prstGeom prst="line">
-            <a:avLst/>
-          </a:prstGeom>
-          <a:ln w="25400">
-            <a:solidFill>
-              <a:srgbClr val="8EDBD4"/>
-            </a:solidFill>
-          </a:ln>
-          <a:effectLst/>
-        </p:spPr>
-      </p:cxnSp>
-      <p:cxnSp>
-        <p:nvCxnSpPr>
-          <p:cNvPr id="17" name="line16" descr="sci-ppt:C2-E14-016"/>
-          <p:cNvCxnSpPr/>
-          <p:nvPr/>
-        </p:nvCxnSpPr>
-        <p:spPr>
-          <a:xfrm flipV="1">
-            <a:off x="7370064" y="3693514"/>
-            <a:ext cx="100584" cy="50534"/>
-          </a:xfrm>
-          <a:prstGeom prst="line">
-            <a:avLst/>
-          </a:prstGeom>
-          <a:ln w="25400">
-            <a:solidFill>
-              <a:srgbClr val="8EDBD4"/>
-            </a:solidFill>
-          </a:ln>
-          <a:effectLst/>
-        </p:spPr>
-      </p:cxnSp>
-      <p:cxnSp>
-        <p:nvCxnSpPr>
-          <p:cNvPr id="18" name="line17" descr="sci-ppt:C2-E14-017"/>
-          <p:cNvCxnSpPr/>
-          <p:nvPr/>
-        </p:nvCxnSpPr>
-        <p:spPr>
-          <a:xfrm flipV="1">
-            <a:off x="7470648" y="3638092"/>
-            <a:ext cx="100583" cy="55422"/>
-          </a:xfrm>
-          <a:prstGeom prst="line">
-            <a:avLst/>
-          </a:prstGeom>
-          <a:ln w="25400">
-            <a:solidFill>
-              <a:srgbClr val="8EDBD4"/>
-            </a:solidFill>
-          </a:ln>
-          <a:effectLst/>
-        </p:spPr>
-      </p:cxnSp>
-      <p:cxnSp>
-        <p:nvCxnSpPr>
-          <p:cNvPr id="19" name="line18" descr="sci-ppt:C2-E14-018"/>
-          <p:cNvCxnSpPr/>
-          <p:nvPr/>
-        </p:nvCxnSpPr>
-        <p:spPr>
-          <a:xfrm flipV="1">
-            <a:off x="7571231" y="3578556"/>
-            <a:ext cx="100585" cy="59536"/>
-          </a:xfrm>
-          <a:prstGeom prst="line">
-            <a:avLst/>
-          </a:prstGeom>
-          <a:ln w="25400">
-            <a:solidFill>
-              <a:srgbClr val="8EDBD4"/>
-            </a:solidFill>
-          </a:ln>
-          <a:effectLst/>
-        </p:spPr>
-      </p:cxnSp>
-      <p:cxnSp>
-        <p:nvCxnSpPr>
-          <p:cNvPr id="20" name="line19" descr="sci-ppt:C2-E14-019"/>
-          <p:cNvCxnSpPr/>
-          <p:nvPr/>
-        </p:nvCxnSpPr>
-        <p:spPr>
-          <a:xfrm flipV="1">
-            <a:off x="7671816" y="3515677"/>
-            <a:ext cx="100584" cy="62879"/>
-          </a:xfrm>
-          <a:prstGeom prst="line">
-            <a:avLst/>
-          </a:prstGeom>
-          <a:ln w="25400">
-            <a:solidFill>
-              <a:srgbClr val="8EDBD4"/>
-            </a:solidFill>
-          </a:ln>
-          <a:effectLst/>
-        </p:spPr>
-      </p:cxnSp>
-      <p:cxnSp>
-        <p:nvCxnSpPr>
-          <p:cNvPr id="21" name="line20" descr="sci-ppt:C2-E14-020"/>
-          <p:cNvCxnSpPr/>
-          <p:nvPr/>
-        </p:nvCxnSpPr>
-        <p:spPr>
-          <a:xfrm flipV="1">
-            <a:off x="7772400" y="3450226"/>
-            <a:ext cx="100583" cy="65451"/>
-          </a:xfrm>
-          <a:prstGeom prst="line">
-            <a:avLst/>
-          </a:prstGeom>
-          <a:ln w="25400">
-            <a:solidFill>
-              <a:srgbClr val="8EDBD4"/>
-            </a:solidFill>
-          </a:ln>
-          <a:effectLst/>
-        </p:spPr>
-      </p:cxnSp>
-      <p:cxnSp>
-        <p:nvCxnSpPr>
-          <p:cNvPr id="22" name="line21" descr="sci-ppt:C2-E14-021"/>
-          <p:cNvCxnSpPr/>
-          <p:nvPr/>
-        </p:nvCxnSpPr>
-        <p:spPr>
-          <a:xfrm flipV="1">
-            <a:off x="7872983" y="3382975"/>
-            <a:ext cx="100585" cy="67251"/>
-          </a:xfrm>
-          <a:prstGeom prst="line">
-            <a:avLst/>
-          </a:prstGeom>
-          <a:ln w="25400">
-            <a:solidFill>
-              <a:srgbClr val="8EDBD4"/>
-            </a:solidFill>
-          </a:ln>
-          <a:effectLst/>
-        </p:spPr>
-      </p:cxnSp>
-      <p:cxnSp>
-        <p:nvCxnSpPr>
-          <p:cNvPr id="23" name="line22" descr="sci-ppt:C2-E14-022"/>
-          <p:cNvCxnSpPr/>
-          <p:nvPr/>
-        </p:nvCxnSpPr>
-        <p:spPr>
-          <a:xfrm flipV="1">
-            <a:off x="7973568" y="3314695"/>
-            <a:ext cx="100584" cy="68280"/>
-          </a:xfrm>
-          <a:prstGeom prst="line">
-            <a:avLst/>
-          </a:prstGeom>
-          <a:ln w="25400">
-            <a:solidFill>
-              <a:srgbClr val="8EDBD4"/>
-            </a:solidFill>
-          </a:ln>
-          <a:effectLst/>
-        </p:spPr>
-      </p:cxnSp>
-      <p:cxnSp>
-        <p:nvCxnSpPr>
-          <p:cNvPr id="24" name="line23" descr="sci-ppt:C2-E14-023"/>
-          <p:cNvCxnSpPr/>
-          <p:nvPr/>
-        </p:nvCxnSpPr>
-        <p:spPr>
-          <a:xfrm flipV="1">
-            <a:off x="8074152" y="3246158"/>
-            <a:ext cx="100584" cy="68537"/>
-          </a:xfrm>
-          <a:prstGeom prst="line">
-            <a:avLst/>
-          </a:prstGeom>
-          <a:ln w="25400">
-            <a:solidFill>
-              <a:srgbClr val="8EDBD4"/>
-            </a:solidFill>
-          </a:ln>
-          <a:effectLst/>
-        </p:spPr>
-      </p:cxnSp>
-      <p:cxnSp>
-        <p:nvCxnSpPr>
-          <p:cNvPr id="25" name="line24" descr="sci-ppt:C2-E14-024"/>
-          <p:cNvCxnSpPr/>
-          <p:nvPr/>
-        </p:nvCxnSpPr>
-        <p:spPr>
-          <a:xfrm flipV="1">
-            <a:off x="8174736" y="3178135"/>
-            <a:ext cx="100584" cy="68023"/>
-          </a:xfrm>
-          <a:prstGeom prst="line">
-            <a:avLst/>
-          </a:prstGeom>
-          <a:ln w="25400">
-            <a:solidFill>
-              <a:srgbClr val="8EDBD4"/>
-            </a:solidFill>
-          </a:ln>
-          <a:effectLst/>
-        </p:spPr>
-      </p:cxnSp>
-      <p:cxnSp>
-        <p:nvCxnSpPr>
-          <p:cNvPr id="26" name="line25" descr="sci-ppt:C2-E14-025"/>
-          <p:cNvCxnSpPr/>
-          <p:nvPr/>
-        </p:nvCxnSpPr>
-        <p:spPr>
-          <a:xfrm flipV="1">
-            <a:off x="8275320" y="3111398"/>
-            <a:ext cx="100584" cy="66737"/>
-          </a:xfrm>
-          <a:prstGeom prst="line">
-            <a:avLst/>
-          </a:prstGeom>
-          <a:ln w="25400">
-            <a:solidFill>
-              <a:srgbClr val="8EDBD4"/>
-            </a:solidFill>
-          </a:ln>
-          <a:effectLst/>
-        </p:spPr>
-      </p:cxnSp>
-      <p:cxnSp>
-        <p:nvCxnSpPr>
-          <p:cNvPr id="27" name="line26" descr="sci-ppt:C2-E14-026"/>
-          <p:cNvCxnSpPr/>
-          <p:nvPr/>
-        </p:nvCxnSpPr>
-        <p:spPr>
-          <a:xfrm flipV="1">
-            <a:off x="8375904" y="3046718"/>
-            <a:ext cx="100584" cy="64680"/>
-          </a:xfrm>
-          <a:prstGeom prst="line">
-            <a:avLst/>
-          </a:prstGeom>
-          <a:ln w="25400">
-            <a:solidFill>
-              <a:srgbClr val="8EDBD4"/>
-            </a:solidFill>
-          </a:ln>
-          <a:effectLst/>
-        </p:spPr>
-      </p:cxnSp>
-      <p:cxnSp>
-        <p:nvCxnSpPr>
-          <p:cNvPr id="28" name="line27" descr="sci-ppt:C2-E14-027"/>
-          <p:cNvCxnSpPr/>
-          <p:nvPr/>
-        </p:nvCxnSpPr>
-        <p:spPr>
-          <a:xfrm flipV="1">
-            <a:off x="8476488" y="2984868"/>
-            <a:ext cx="100584" cy="61850"/>
-          </a:xfrm>
-          <a:prstGeom prst="line">
-            <a:avLst/>
-          </a:prstGeom>
-          <a:ln w="25400">
-            <a:solidFill>
-              <a:srgbClr val="8EDBD4"/>
-            </a:solidFill>
-          </a:ln>
-          <a:effectLst/>
-        </p:spPr>
-      </p:cxnSp>
-      <p:cxnSp>
-        <p:nvCxnSpPr>
-          <p:cNvPr id="29" name="line28" descr="sci-ppt:C2-E14-028"/>
-          <p:cNvCxnSpPr/>
-          <p:nvPr/>
-        </p:nvCxnSpPr>
-        <p:spPr>
-          <a:xfrm flipV="1">
-            <a:off x="8577072" y="2926618"/>
-            <a:ext cx="100584" cy="58250"/>
-          </a:xfrm>
-          <a:prstGeom prst="line">
-            <a:avLst/>
-          </a:prstGeom>
-          <a:ln w="25400">
-            <a:solidFill>
-              <a:srgbClr val="8EDBD4"/>
-            </a:solidFill>
-          </a:ln>
-          <a:effectLst/>
-        </p:spPr>
-      </p:cxnSp>
-      <p:cxnSp>
-        <p:nvCxnSpPr>
-          <p:cNvPr id="30" name="line29" descr="sci-ppt:C2-E14-029"/>
-          <p:cNvCxnSpPr/>
-          <p:nvPr/>
-        </p:nvCxnSpPr>
-        <p:spPr>
-          <a:xfrm flipV="1">
-            <a:off x="8677656" y="2872740"/>
-            <a:ext cx="100584" cy="53878"/>
-          </a:xfrm>
-          <a:prstGeom prst="line">
-            <a:avLst/>
-          </a:prstGeom>
-          <a:ln w="25400">
-            <a:solidFill>
-              <a:srgbClr val="8EDBD4"/>
-            </a:solidFill>
-          </a:ln>
-          <a:effectLst/>
-        </p:spPr>
-      </p:cxnSp>
-      <p:cxnSp>
-        <p:nvCxnSpPr>
-          <p:cNvPr id="31" name="line30" descr="sci-ppt:C2-E14-030"/>
-          <p:cNvCxnSpPr/>
-          <p:nvPr/>
-        </p:nvCxnSpPr>
-        <p:spPr>
-          <a:xfrm flipV="1">
-            <a:off x="8778240" y="2824005"/>
-            <a:ext cx="100584" cy="48735"/>
-          </a:xfrm>
-          <a:prstGeom prst="line">
-            <a:avLst/>
-          </a:prstGeom>
-          <a:ln w="25400">
-            <a:solidFill>
-              <a:srgbClr val="8EDBD4"/>
-            </a:solidFill>
-          </a:ln>
-          <a:effectLst/>
-        </p:spPr>
-      </p:cxnSp>
-      <p:cxnSp>
-        <p:nvCxnSpPr>
-          <p:cNvPr id="32" name="line31" descr="sci-ppt:C2-E14-031"/>
-          <p:cNvCxnSpPr/>
-          <p:nvPr/>
-        </p:nvCxnSpPr>
-        <p:spPr>
-          <a:xfrm flipV="1">
-            <a:off x="8878824" y="2781185"/>
-            <a:ext cx="100584" cy="42820"/>
-          </a:xfrm>
-          <a:prstGeom prst="line">
-            <a:avLst/>
-          </a:prstGeom>
-          <a:ln w="25400">
-            <a:solidFill>
-              <a:srgbClr val="8EDBD4"/>
-            </a:solidFill>
-          </a:ln>
-          <a:effectLst/>
-        </p:spPr>
-      </p:cxnSp>
-      <p:cxnSp>
-        <p:nvCxnSpPr>
-          <p:cNvPr id="33" name="line32" descr="sci-ppt:C2-E14-032"/>
-          <p:cNvCxnSpPr/>
-          <p:nvPr/>
-        </p:nvCxnSpPr>
-        <p:spPr>
-          <a:xfrm flipV="1">
-            <a:off x="8979408" y="2745052"/>
-            <a:ext cx="100584" cy="36133"/>
-          </a:xfrm>
-          <a:prstGeom prst="line">
-            <a:avLst/>
-          </a:prstGeom>
-          <a:ln w="25400">
-            <a:solidFill>
-              <a:srgbClr val="8EDBD4"/>
-            </a:solidFill>
-          </a:ln>
-          <a:effectLst/>
-        </p:spPr>
-      </p:cxnSp>
-      <p:cxnSp>
-        <p:nvCxnSpPr>
-          <p:cNvPr id="34" name="line33" descr="sci-ppt:C2-E14-033"/>
-          <p:cNvCxnSpPr/>
-          <p:nvPr/>
-        </p:nvCxnSpPr>
-        <p:spPr>
-          <a:xfrm flipV="1">
-            <a:off x="9079992" y="2716377"/>
-            <a:ext cx="100584" cy="28675"/>
-          </a:xfrm>
-          <a:prstGeom prst="line">
-            <a:avLst/>
-          </a:prstGeom>
-          <a:ln w="25400">
-            <a:solidFill>
-              <a:srgbClr val="8EDBD4"/>
-            </a:solidFill>
-          </a:ln>
-          <a:effectLst/>
-        </p:spPr>
-      </p:cxnSp>
-      <p:cxnSp>
-        <p:nvCxnSpPr>
-          <p:cNvPr id="35" name="line34" descr="sci-ppt:C2-E14-034"/>
-          <p:cNvCxnSpPr/>
-          <p:nvPr/>
-        </p:nvCxnSpPr>
-        <p:spPr>
-          <a:xfrm flipV="1">
-            <a:off x="9180576" y="2695932"/>
-            <a:ext cx="100584" cy="20445"/>
-          </a:xfrm>
-          <a:prstGeom prst="line">
-            <a:avLst/>
-          </a:prstGeom>
-          <a:ln w="25400">
-            <a:solidFill>
-              <a:srgbClr val="8EDBD4"/>
-            </a:solidFill>
-          </a:ln>
-          <a:effectLst/>
-        </p:spPr>
-      </p:cxnSp>
-      <p:cxnSp>
-        <p:nvCxnSpPr>
-          <p:cNvPr id="36" name="line35" descr="sci-ppt:C2-E14-035"/>
-          <p:cNvCxnSpPr/>
-          <p:nvPr/>
-        </p:nvCxnSpPr>
-        <p:spPr>
-          <a:xfrm flipV="1">
-            <a:off x="9281160" y="2684487"/>
-            <a:ext cx="100584" cy="11445"/>
-          </a:xfrm>
-          <a:prstGeom prst="line">
-            <a:avLst/>
-          </a:prstGeom>
-          <a:ln w="25400">
-            <a:solidFill>
-              <a:srgbClr val="8EDBD4"/>
-            </a:solidFill>
-          </a:ln>
-          <a:effectLst/>
-        </p:spPr>
-      </p:cxnSp>
-      <p:cxnSp>
-        <p:nvCxnSpPr>
-          <p:cNvPr id="37" name="line36" descr="sci-ppt:C2-E14-036"/>
-          <p:cNvCxnSpPr/>
-          <p:nvPr/>
-        </p:nvCxnSpPr>
-        <p:spPr>
-          <a:xfrm flipV="1">
-            <a:off x="9381744" y="2682816"/>
-            <a:ext cx="100584" cy="1671"/>
-          </a:xfrm>
-          <a:prstGeom prst="line">
-            <a:avLst/>
-          </a:prstGeom>
-          <a:ln w="25400">
-            <a:solidFill>
-              <a:srgbClr val="8EDBD4"/>
-            </a:solidFill>
-          </a:ln>
-          <a:effectLst/>
-        </p:spPr>
-      </p:cxnSp>
-      <p:cxnSp>
-        <p:nvCxnSpPr>
-          <p:cNvPr id="38" name="line37" descr="sci-ppt:C2-E14-037"/>
-          <p:cNvCxnSpPr/>
-          <p:nvPr/>
-        </p:nvCxnSpPr>
-        <p:spPr>
-          <a:xfrm>
-            <a:off x="9482328" y="2682816"/>
-            <a:ext cx="100584" cy="8872"/>
-          </a:xfrm>
-          <a:prstGeom prst="line">
-            <a:avLst/>
-          </a:prstGeom>
-          <a:ln w="25400">
-            <a:solidFill>
-              <a:srgbClr val="8EDBD4"/>
-            </a:solidFill>
-          </a:ln>
-          <a:effectLst/>
-        </p:spPr>
-      </p:cxnSp>
-      <p:cxnSp>
-        <p:nvCxnSpPr>
-          <p:cNvPr id="39" name="line38" descr="sci-ppt:C2-E14-038"/>
-          <p:cNvCxnSpPr/>
-          <p:nvPr/>
-        </p:nvCxnSpPr>
-        <p:spPr>
-          <a:xfrm>
-            <a:off x="9582912" y="2691688"/>
-            <a:ext cx="100584" cy="20189"/>
-          </a:xfrm>
-          <a:prstGeom prst="line">
-            <a:avLst/>
-          </a:prstGeom>
-          <a:ln w="25400">
-            <a:solidFill>
-              <a:srgbClr val="8EDBD4"/>
-            </a:solidFill>
-          </a:ln>
-          <a:effectLst/>
-        </p:spPr>
-      </p:cxnSp>
-      <p:cxnSp>
-        <p:nvCxnSpPr>
-          <p:cNvPr id="40" name="line39" descr="sci-ppt:C2-E14-039"/>
-          <p:cNvCxnSpPr/>
-          <p:nvPr/>
-        </p:nvCxnSpPr>
-        <p:spPr>
-          <a:xfrm>
-            <a:off x="9683496" y="2711877"/>
-            <a:ext cx="100584" cy="32275"/>
-          </a:xfrm>
-          <a:prstGeom prst="line">
-            <a:avLst/>
-          </a:prstGeom>
-          <a:ln w="25400">
-            <a:solidFill>
-              <a:srgbClr val="8EDBD4"/>
-            </a:solidFill>
-          </a:ln>
-          <a:effectLst/>
-        </p:spPr>
-      </p:cxnSp>
-      <p:cxnSp>
-        <p:nvCxnSpPr>
-          <p:cNvPr id="41" name="line40" descr="sci-ppt:C2-E14-040"/>
-          <p:cNvCxnSpPr/>
-          <p:nvPr/>
-        </p:nvCxnSpPr>
-        <p:spPr>
-          <a:xfrm>
-            <a:off x="9784080" y="2744152"/>
-            <a:ext cx="100584" cy="45134"/>
-          </a:xfrm>
-          <a:prstGeom prst="line">
-            <a:avLst/>
-          </a:prstGeom>
-          <a:ln w="25400">
-            <a:solidFill>
-              <a:srgbClr val="8EDBD4"/>
-            </a:solidFill>
-          </a:ln>
-          <a:effectLst/>
-        </p:spPr>
-      </p:cxnSp>
-      <p:cxnSp>
-        <p:nvCxnSpPr>
-          <p:cNvPr id="42" name="line41" descr="sci-ppt:C2-E14-041"/>
-          <p:cNvCxnSpPr/>
-          <p:nvPr/>
-        </p:nvCxnSpPr>
-        <p:spPr>
-          <a:xfrm>
-            <a:off x="9884664" y="2789286"/>
-            <a:ext cx="100584" cy="58765"/>
-          </a:xfrm>
-          <a:prstGeom prst="line">
-            <a:avLst/>
-          </a:prstGeom>
-          <a:ln w="25400">
-            <a:solidFill>
-              <a:srgbClr val="8EDBD4"/>
-            </a:solidFill>
-          </a:ln>
-          <a:effectLst/>
-        </p:spPr>
-      </p:cxnSp>
-      <p:cxnSp>
-        <p:nvCxnSpPr>
-          <p:cNvPr id="43" name="line42" descr="sci-ppt:C2-E14-042"/>
-          <p:cNvCxnSpPr/>
-          <p:nvPr/>
-        </p:nvCxnSpPr>
-        <p:spPr>
-          <a:xfrm>
-            <a:off x="9985248" y="2848051"/>
-            <a:ext cx="100584" cy="73166"/>
-          </a:xfrm>
-          <a:prstGeom prst="line">
-            <a:avLst/>
-          </a:prstGeom>
-          <a:ln w="25400">
-            <a:solidFill>
-              <a:srgbClr val="8EDBD4"/>
-            </a:solidFill>
-          </a:ln>
-          <a:effectLst/>
-        </p:spPr>
-      </p:cxnSp>
-      <p:cxnSp>
-        <p:nvCxnSpPr>
-          <p:cNvPr id="44" name="line43" descr="sci-ppt:C2-E14-043"/>
-          <p:cNvCxnSpPr/>
-          <p:nvPr/>
-        </p:nvCxnSpPr>
-        <p:spPr>
-          <a:xfrm>
-            <a:off x="10085832" y="2921217"/>
-            <a:ext cx="100584" cy="88340"/>
-          </a:xfrm>
-          <a:prstGeom prst="line">
-            <a:avLst/>
-          </a:prstGeom>
-          <a:ln w="25400">
-            <a:solidFill>
-              <a:srgbClr val="8EDBD4"/>
-            </a:solidFill>
-          </a:ln>
-          <a:effectLst/>
-        </p:spPr>
-      </p:cxnSp>
-      <p:cxnSp>
-        <p:nvCxnSpPr>
-          <p:cNvPr id="45" name="line44" descr="sci-ppt:C2-E14-044"/>
-          <p:cNvCxnSpPr/>
-          <p:nvPr/>
-        </p:nvCxnSpPr>
-        <p:spPr>
-          <a:xfrm>
-            <a:off x="10186416" y="3009557"/>
-            <a:ext cx="100584" cy="104284"/>
-          </a:xfrm>
-          <a:prstGeom prst="line">
-            <a:avLst/>
-          </a:prstGeom>
-          <a:ln w="25400">
-            <a:solidFill>
-              <a:srgbClr val="8EDBD4"/>
-            </a:solidFill>
-          </a:ln>
-          <a:effectLst/>
-        </p:spPr>
-      </p:cxnSp>
-      <p:cxnSp>
-        <p:nvCxnSpPr>
-          <p:cNvPr id="46" name="line45" descr="sci-ppt:C2-E14-045"/>
-          <p:cNvCxnSpPr/>
-          <p:nvPr/>
-        </p:nvCxnSpPr>
-        <p:spPr>
-          <a:xfrm>
-            <a:off x="10287000" y="3113841"/>
-            <a:ext cx="100584" cy="121001"/>
-          </a:xfrm>
-          <a:prstGeom prst="line">
-            <a:avLst/>
-          </a:prstGeom>
-          <a:ln w="25400">
-            <a:solidFill>
-              <a:srgbClr val="8EDBD4"/>
-            </a:solidFill>
-          </a:ln>
-          <a:effectLst/>
-        </p:spPr>
-      </p:cxnSp>
-      <p:cxnSp>
-        <p:nvCxnSpPr>
-          <p:cNvPr id="47" name="line46" descr="sci-ppt:C2-E14-046"/>
-          <p:cNvCxnSpPr/>
-          <p:nvPr/>
-        </p:nvCxnSpPr>
-        <p:spPr>
-          <a:xfrm>
-            <a:off x="10387584" y="3234842"/>
-            <a:ext cx="100584" cy="138489"/>
-          </a:xfrm>
-          <a:prstGeom prst="line">
-            <a:avLst/>
-          </a:prstGeom>
-          <a:ln w="25400">
-            <a:solidFill>
-              <a:srgbClr val="8EDBD4"/>
-            </a:solidFill>
-          </a:ln>
-          <a:effectLst/>
-        </p:spPr>
-      </p:cxnSp>
-      <p:cxnSp>
-        <p:nvCxnSpPr>
-          <p:cNvPr id="48" name="line47" descr="sci-ppt:C2-E14-047"/>
-          <p:cNvCxnSpPr/>
-          <p:nvPr/>
-        </p:nvCxnSpPr>
-        <p:spPr>
-          <a:xfrm>
-            <a:off x="10488168" y="3373331"/>
-            <a:ext cx="100584" cy="156748"/>
-          </a:xfrm>
-          <a:prstGeom prst="line">
-            <a:avLst/>
-          </a:prstGeom>
-          <a:ln w="25400">
-            <a:solidFill>
-              <a:srgbClr val="8EDBD4"/>
-            </a:solidFill>
-          </a:ln>
-          <a:effectLst/>
-        </p:spPr>
-      </p:cxnSp>
-      <p:cxnSp>
-        <p:nvCxnSpPr>
-          <p:cNvPr id="49" name="line48" descr="sci-ppt:C2-E14-048"/>
-          <p:cNvCxnSpPr/>
-          <p:nvPr/>
-        </p:nvCxnSpPr>
-        <p:spPr>
-          <a:xfrm>
-            <a:off x="10588752" y="3530079"/>
-            <a:ext cx="100584" cy="175779"/>
-          </a:xfrm>
-          <a:prstGeom prst="line">
-            <a:avLst/>
-          </a:prstGeom>
-          <a:ln w="25400">
-            <a:solidFill>
-              <a:srgbClr val="8EDBD4"/>
-            </a:solidFill>
-          </a:ln>
-          <a:effectLst/>
-        </p:spPr>
-      </p:cxnSp>
-      <p:cxnSp>
-        <p:nvCxnSpPr>
-          <p:cNvPr id="50" name="line49" descr="sci-ppt:C2-E14-049"/>
-          <p:cNvCxnSpPr/>
-          <p:nvPr/>
-        </p:nvCxnSpPr>
-        <p:spPr>
-          <a:xfrm>
-            <a:off x="10689336" y="3705858"/>
-            <a:ext cx="100584" cy="195582"/>
-          </a:xfrm>
-          <a:prstGeom prst="line">
-            <a:avLst/>
-          </a:prstGeom>
-          <a:ln w="25400">
-            <a:solidFill>
-              <a:srgbClr val="8EDBD4"/>
-            </a:solidFill>
-          </a:ln>
-          <a:effectLst/>
-        </p:spPr>
-      </p:cxnSp>
-      <p:sp>
-        <p:nvSpPr>
-          <p:cNvPr id="51" name="text50" descr="sci-ppt:C2-E14-050"/>
+        <p:txBody>
+          <a:bodyPr rtlCol="0" anchor="ctr"/>
+          <a:lstStyle/>
+          <a:p>
+            <a:pPr algn="ctr"/>
+          </a:p>
+        </p:txBody>
+      </p:sp>
+      <p:sp>
+        <p:nvSpPr>
+          <p:cNvPr id="52" name="C2-E14 text 50" descr="sci-ppt:o050"/>
           <p:cNvSpPr txBox="1"/>
           <p:nvPr/>
         </p:nvSpPr>
         <p:spPr>
           <a:xfrm>
-            <a:off x="8595360" y="2194560"/>
-            <a:ext cx="2194560" cy="377952"/>
+            <a:off x="914400" y="5733288"/>
+            <a:ext cx="10972800" cy="239395"/>
           </a:xfrm>
           <a:prstGeom prst="rect">
             <a:avLst/>
@@ -4306,7 +5581,7 @@
           <a:effectLst/>
         </p:spPr>
         <p:txBody>
-          <a:bodyPr wrap="none" lIns="27432" rIns="27432" tIns="18288" bIns="18288" anchor="ctr">
+          <a:bodyPr wrap="none" lIns="18288" rIns="18288" tIns="18288" bIns="18288" anchor="t">
             <a:spAutoFit/>
           </a:bodyPr>
           <a:lstStyle/>
@@ -4317,27 +5592,27 @@
               </a:spcAft>
             </a:pPr>
             <a:r>
-              <a:rPr sz="1920" b="0" i="0">
+              <a:rPr sz="1250" b="0" i="0">
                 <a:solidFill>
                   <a:srgbClr val="E7F0F3"/>
                 </a:solidFill>
                 <a:latin typeface="Arial"/>
               </a:rPr>
-              <a:t>r*, W*</a:t>
-            </a:r>
-          </a:p>
-        </p:txBody>
-      </p:sp>
-      <p:sp>
-        <p:nvSpPr>
-          <p:cNvPr id="52" name="text51" descr="sci-ppt:C2-E14-051"/>
+              <a:t>All curves are scaled by W* and r*, so one picture holds for any σᵥₚ and Δpₙ (classical homogeneous capillarity).</a:t>
+            </a:r>
+          </a:p>
+        </p:txBody>
+      </p:sp>
+      <p:sp>
+        <p:nvSpPr>
+          <p:cNvPr id="53" name="C2-E14 text 51" descr="sci-ppt:o051"/>
           <p:cNvSpPr txBox="1"/>
           <p:nvPr/>
         </p:nvSpPr>
         <p:spPr>
           <a:xfrm>
-            <a:off x="365760" y="4974336"/>
-            <a:ext cx="5547360" cy="321259"/>
+            <a:off x="320040" y="6510528"/>
+            <a:ext cx="11521440" cy="200660"/>
           </a:xfrm>
           <a:prstGeom prst="rect">
             <a:avLst/>
@@ -4346,7 +5621,7 @@
           <a:effectLst/>
         </p:spPr>
         <p:txBody>
-          <a:bodyPr wrap="none" lIns="27432" rIns="27432" tIns="18288" bIns="18288" anchor="ctr">
+          <a:bodyPr wrap="none" lIns="18288" rIns="18288" tIns="18288" bIns="18288" anchor="t">
             <a:spAutoFit/>
           </a:bodyPr>
           <a:lstStyle/>
@@ -4357,373 +5632,13 @@
               </a:spcAft>
             </a:pPr>
             <a:r>
-              <a:rPr sz="1632" b="0" i="0">
-                <a:solidFill>
-                  <a:srgbClr val="E7F0F3"/>
-                </a:solidFill>
-                <a:latin typeface="Arial"/>
-              </a:rPr>
-              <a:t>r_n: nucleus radius inside PFC</a:t>
-            </a:r>
-          </a:p>
-        </p:txBody>
-      </p:sp>
-      <p:sp>
-        <p:nvSpPr>
-          <p:cNvPr id="53" name="text52" descr="sci-ppt:C2-E14-052"/>
-          <p:cNvSpPr txBox="1"/>
-          <p:nvPr/>
-        </p:nvSpPr>
-        <p:spPr>
-          <a:xfrm>
-            <a:off x="365760" y="5266944"/>
-            <a:ext cx="5547360" cy="321259"/>
-          </a:xfrm>
-          <a:prstGeom prst="rect">
-            <a:avLst/>
-          </a:prstGeom>
-          <a:noFill/>
-          <a:effectLst/>
-        </p:spPr>
-        <p:txBody>
-          <a:bodyPr wrap="none" lIns="27432" rIns="27432" tIns="18288" bIns="18288" anchor="ctr">
-            <a:spAutoFit/>
-          </a:bodyPr>
-          <a:lstStyle/>
-          <a:p>
-            <a:pPr algn="l">
-              <a:spcAft>
-                <a:spcPts val="0"/>
-              </a:spcAft>
-            </a:pPr>
-            <a:r>
-              <a:rPr sz="1632" b="0" i="0">
-                <a:solidFill>
-                  <a:srgbClr val="E7F0F3"/>
-                </a:solidFill>
-                <a:latin typeface="Arial"/>
-              </a:rPr>
-              <a:t>T_i: local nucleus temperature</a:t>
-            </a:r>
-          </a:p>
-        </p:txBody>
-      </p:sp>
-      <p:sp>
-        <p:nvSpPr>
-          <p:cNvPr id="54" name="text53" descr="sci-ppt:C2-E14-053"/>
-          <p:cNvSpPr txBox="1"/>
-          <p:nvPr/>
-        </p:nvSpPr>
-        <p:spPr>
-          <a:xfrm>
-            <a:off x="365760" y="5559552"/>
-            <a:ext cx="5547360" cy="321259"/>
-          </a:xfrm>
-          <a:prstGeom prst="rect">
-            <a:avLst/>
-          </a:prstGeom>
-          <a:noFill/>
-          <a:effectLst/>
-        </p:spPr>
-        <p:txBody>
-          <a:bodyPr wrap="none" lIns="27432" rIns="27432" tIns="18288" bIns="18288" anchor="ctr">
-            <a:spAutoFit/>
-          </a:bodyPr>
-          <a:lstStyle/>
-          <a:p>
-            <a:pPr algn="l">
-              <a:spcAft>
-                <a:spcPts val="0"/>
-              </a:spcAft>
-            </a:pPr>
-            <a:r>
-              <a:rPr sz="1632" b="0" i="0">
-                <a:solidFill>
-                  <a:srgbClr val="E7F0F3"/>
-                </a:solidFill>
-                <a:latin typeface="Arial"/>
-              </a:rPr>
-              <a:t>p_sat,PFC: equilibrium vapor reference</a:t>
-            </a:r>
-          </a:p>
-        </p:txBody>
-      </p:sp>
-      <p:sp>
-        <p:nvSpPr>
-          <p:cNvPr id="55" name="text54" descr="sci-ppt:C2-E14-054"/>
-          <p:cNvSpPr txBox="1"/>
-          <p:nvPr/>
-        </p:nvSpPr>
-        <p:spPr>
-          <a:xfrm>
-            <a:off x="365760" y="5852160"/>
-            <a:ext cx="5547360" cy="321259"/>
-          </a:xfrm>
-          <a:prstGeom prst="rect">
-            <a:avLst/>
-          </a:prstGeom>
-          <a:noFill/>
-          <a:effectLst/>
-        </p:spPr>
-        <p:txBody>
-          <a:bodyPr wrap="none" lIns="27432" rIns="27432" tIns="18288" bIns="18288" anchor="ctr">
-            <a:spAutoFit/>
-          </a:bodyPr>
-          <a:lstStyle/>
-          <a:p>
-            <a:pPr algn="l">
-              <a:spcAft>
-                <a:spcPts val="0"/>
-              </a:spcAft>
-            </a:pPr>
-            <a:r>
-              <a:rPr sz="1632" b="0" i="0">
-                <a:solidFill>
-                  <a:srgbClr val="E7F0F3"/>
-                </a:solidFill>
-                <a:latin typeface="Arial"/>
-              </a:rPr>
-              <a:t>W: surface cost minus volume gain</a:t>
-            </a:r>
-          </a:p>
-        </p:txBody>
-      </p:sp>
-      <p:sp>
-        <p:nvSpPr>
-          <p:cNvPr id="56" name="text55" descr="sci-ppt:C2-E14-055"/>
-          <p:cNvSpPr txBox="1"/>
-          <p:nvPr/>
-        </p:nvSpPr>
-        <p:spPr>
-          <a:xfrm>
-            <a:off x="6156960" y="4974336"/>
-            <a:ext cx="5547360" cy="321259"/>
-          </a:xfrm>
-          <a:prstGeom prst="rect">
-            <a:avLst/>
-          </a:prstGeom>
-          <a:noFill/>
-          <a:effectLst/>
-        </p:spPr>
-        <p:txBody>
-          <a:bodyPr wrap="none" lIns="27432" rIns="27432" tIns="18288" bIns="18288" anchor="ctr">
-            <a:spAutoFit/>
-          </a:bodyPr>
-          <a:lstStyle/>
-          <a:p>
-            <a:pPr algn="l">
-              <a:spcAft>
-                <a:spcPts val="0"/>
-              </a:spcAft>
-            </a:pPr>
-            <a:r>
-              <a:rPr sz="1632" b="0" i="0">
-                <a:solidFill>
-                  <a:srgbClr val="E7F0F3"/>
-                </a:solidFill>
-                <a:latin typeface="Arial"/>
-              </a:rPr>
-              <a:t>σ_vp: newly created vapor–PFC interface</a:t>
-            </a:r>
-          </a:p>
-        </p:txBody>
-      </p:sp>
-      <p:sp>
-        <p:nvSpPr>
-          <p:cNvPr id="57" name="text56" descr="sci-ppt:C2-E14-056"/>
-          <p:cNvSpPr txBox="1"/>
-          <p:nvPr/>
-        </p:nvSpPr>
-        <p:spPr>
-          <a:xfrm>
-            <a:off x="6156960" y="5266944"/>
-            <a:ext cx="5547360" cy="321259"/>
-          </a:xfrm>
-          <a:prstGeom prst="rect">
-            <a:avLst/>
-          </a:prstGeom>
-          <a:noFill/>
-          <a:effectLst/>
-        </p:spPr>
-        <p:txBody>
-          <a:bodyPr wrap="none" lIns="27432" rIns="27432" tIns="18288" bIns="18288" anchor="ctr">
-            <a:spAutoFit/>
-          </a:bodyPr>
-          <a:lstStyle/>
-          <a:p>
-            <a:pPr algn="l">
-              <a:spcAft>
-                <a:spcPts val="0"/>
-              </a:spcAft>
-            </a:pPr>
-            <a:r>
-              <a:rPr sz="1632" b="0" i="0">
-                <a:solidFill>
-                  <a:srgbClr val="E7F0F3"/>
-                </a:solidFill>
-                <a:latin typeface="Arial"/>
-              </a:rPr>
-              <a:t>p_d: surrounding PFC liquid</a:t>
-            </a:r>
-          </a:p>
-        </p:txBody>
-      </p:sp>
-      <p:sp>
-        <p:nvSpPr>
-          <p:cNvPr id="58" name="text57" descr="sci-ppt:C2-E14-057"/>
-          <p:cNvSpPr txBox="1"/>
-          <p:nvPr/>
-        </p:nvSpPr>
-        <p:spPr>
-          <a:xfrm>
-            <a:off x="6156960" y="5559552"/>
-            <a:ext cx="5547360" cy="321259"/>
-          </a:xfrm>
-          <a:prstGeom prst="rect">
-            <a:avLst/>
-          </a:prstGeom>
-          <a:noFill/>
-          <a:effectLst/>
-        </p:spPr>
-        <p:txBody>
-          <a:bodyPr wrap="none" lIns="27432" rIns="27432" tIns="18288" bIns="18288" anchor="ctr">
-            <a:spAutoFit/>
-          </a:bodyPr>
-          <a:lstStyle/>
-          <a:p>
-            <a:pPr algn="l">
-              <a:spcAft>
-                <a:spcPts val="0"/>
-              </a:spcAft>
-            </a:pPr>
-            <a:r>
-              <a:rPr sz="1632" b="0" i="0">
-                <a:solidFill>
-                  <a:srgbClr val="E7F0F3"/>
-                </a:solidFill>
-                <a:latin typeface="Arial"/>
-              </a:rPr>
-              <a:t>Δp_n: volume driving</a:t>
-            </a:r>
-          </a:p>
-        </p:txBody>
-      </p:sp>
-      <p:sp>
-        <p:nvSpPr>
-          <p:cNvPr id="59" name="text58" descr="sci-ppt:C2-E14-058"/>
-          <p:cNvSpPr txBox="1"/>
-          <p:nvPr/>
-        </p:nvSpPr>
-        <p:spPr>
-          <a:xfrm>
-            <a:off x="6156960" y="5852160"/>
-            <a:ext cx="5547360" cy="321259"/>
-          </a:xfrm>
-          <a:prstGeom prst="rect">
-            <a:avLst/>
-          </a:prstGeom>
-          <a:noFill/>
-          <a:effectLst/>
-        </p:spPr>
-        <p:txBody>
-          <a:bodyPr wrap="none" lIns="27432" rIns="27432" tIns="18288" bIns="18288" anchor="ctr">
-            <a:spAutoFit/>
-          </a:bodyPr>
-          <a:lstStyle/>
-          <a:p>
-            <a:pPr algn="l">
-              <a:spcAft>
-                <a:spcPts val="0"/>
-              </a:spcAft>
-            </a:pPr>
-            <a:r>
-              <a:rPr sz="1632" b="0" i="0">
-                <a:solidFill>
-                  <a:srgbClr val="E7F0F3"/>
-                </a:solidFill>
-                <a:latin typeface="Arial"/>
-              </a:rPr>
-              <a:t>π: spherical geometry</a:t>
-            </a:r>
-          </a:p>
-        </p:txBody>
-      </p:sp>
-      <p:sp>
-        <p:nvSpPr>
-          <p:cNvPr id="60" name="text59" descr="sci-ppt:C2-E14-059"/>
-          <p:cNvSpPr txBox="1"/>
-          <p:nvPr/>
-        </p:nvSpPr>
-        <p:spPr>
-          <a:xfrm>
-            <a:off x="365760" y="6339840"/>
-            <a:ext cx="11277600" cy="302361"/>
-          </a:xfrm>
-          <a:prstGeom prst="rect">
-            <a:avLst/>
-          </a:prstGeom>
-          <a:noFill/>
-          <a:effectLst/>
-        </p:spPr>
-        <p:txBody>
-          <a:bodyPr wrap="none" lIns="27432" rIns="27432" tIns="18288" bIns="18288" anchor="ctr">
-            <a:spAutoFit/>
-          </a:bodyPr>
-          <a:lstStyle/>
-          <a:p>
-            <a:pPr algn="l">
-              <a:spcAft>
-                <a:spcPts val="0"/>
-              </a:spcAft>
-            </a:pPr>
-            <a:r>
-              <a:rPr sz="1536" b="0" i="0">
+              <a:rPr sz="1000" b="0" i="0">
                 <a:solidFill>
                   <a:srgbClr val="B4C7D2"/>
                 </a:solidFill>
                 <a:latin typeface="Arial"/>
               </a:rPr>
-              <a:t>The outer PFC–carrier tension is a different interface</a:t>
-            </a:r>
-          </a:p>
-        </p:txBody>
-      </p:sp>
-      <p:sp>
-        <p:nvSpPr>
-          <p:cNvPr id="61" name="text60" descr="sci-ppt:C2-E14-060"/>
-          <p:cNvSpPr txBox="1"/>
-          <p:nvPr/>
-        </p:nvSpPr>
-        <p:spPr>
-          <a:xfrm>
-            <a:off x="365760" y="6632448"/>
-            <a:ext cx="11277600" cy="302361"/>
-          </a:xfrm>
-          <a:prstGeom prst="rect">
-            <a:avLst/>
-          </a:prstGeom>
-          <a:noFill/>
-          <a:effectLst/>
-        </p:spPr>
-        <p:txBody>
-          <a:bodyPr wrap="none" lIns="27432" rIns="27432" tIns="18288" bIns="18288" anchor="ctr">
-            <a:spAutoFit/>
-          </a:bodyPr>
-          <a:lstStyle/>
-          <a:p>
-            <a:pPr algn="l">
-              <a:spcAft>
-                <a:spcPts val="0"/>
-              </a:spcAft>
-            </a:pPr>
-            <a:r>
-              <a:rPr sz="1536" b="0" i="0">
-                <a:solidFill>
-                  <a:srgbClr val="B4C7D2"/>
-                </a:solidFill>
-                <a:latin typeface="Arial"/>
-              </a:rPr>
-              <a:t>The whole core cannot be treated as an infinite liquid reservoir</a:t>
+              <a:t>Free energy of Eq. C2-E14 in scaled form: W/W* = 3x² − 2x³, x = rₙ / r*.</a:t>
             </a:r>
           </a:p>
         </p:txBody>
